--- a/ppt_engine/templates/solution_fixed_modules/M3_项目深化方案模板_最终版本.pptx
+++ b/ppt_engine/templates/solution_fixed_modules/M3_项目深化方案模板_最终版本.pptx
@@ -3796,6 +3796,113 @@
           </a:p>
         </p:txBody>
       </p:sp>
+      <p:grpSp>
+        <p:nvGrpSpPr>
+          <p:cNvPr id="4" name="组合 3">
+            <a:extLst>
+              <a:ext uri="{FF2B5EF4-FFF2-40B4-BE49-F238E27FC236}">
+                <a16:creationId xmlns:a16="http://schemas.microsoft.com/office/drawing/2014/main" id="{70E1E8F0-03DF-67C1-718D-CC2606C81257}"/>
+              </a:ext>
+            </a:extLst>
+          </p:cNvPr>
+          <p:cNvGrpSpPr/>
+          <p:nvPr/>
+        </p:nvGrpSpPr>
+        <p:grpSpPr>
+          <a:xfrm>
+            <a:off x="9577302" y="215877"/>
+            <a:ext cx="1695878" cy="706616"/>
+            <a:chOff x="9577302" y="1165376"/>
+            <a:chExt cx="1695878" cy="706616"/>
+          </a:xfrm>
+        </p:grpSpPr>
+        <p:sp>
+          <p:nvSpPr>
+            <p:cNvPr id="5" name="矩形 4">
+              <a:extLst>
+                <a:ext uri="{FF2B5EF4-FFF2-40B4-BE49-F238E27FC236}">
+                  <a16:creationId xmlns:a16="http://schemas.microsoft.com/office/drawing/2014/main" id="{C67A94AF-82DD-9C62-3252-B1AAAB06F14A}"/>
+                </a:ext>
+              </a:extLst>
+            </p:cNvPr>
+            <p:cNvSpPr/>
+            <p:nvPr/>
+          </p:nvSpPr>
+          <p:spPr>
+            <a:xfrm>
+              <a:off x="9721312" y="1295952"/>
+              <a:ext cx="1440100" cy="432030"/>
+            </a:xfrm>
+            <a:prstGeom prst="rect">
+              <a:avLst/>
+            </a:prstGeom>
+            <a:noFill/>
+            <a:ln>
+              <a:noFill/>
+            </a:ln>
+          </p:spPr>
+          <p:style>
+            <a:lnRef idx="2">
+              <a:schemeClr val="accent1">
+                <a:shade val="15000"/>
+              </a:schemeClr>
+            </a:lnRef>
+            <a:fillRef idx="1">
+              <a:schemeClr val="accent1"/>
+            </a:fillRef>
+            <a:effectRef idx="0">
+              <a:schemeClr val="accent1"/>
+            </a:effectRef>
+            <a:fontRef idx="minor">
+              <a:schemeClr val="lt1"/>
+            </a:fontRef>
+          </p:style>
+          <p:txBody>
+            <a:bodyPr rtlCol="0" anchor="ctr"/>
+            <a:lstStyle/>
+            <a:p>
+              <a:pPr algn="ctr"/>
+              <a:endParaRPr lang="zh-CN" altLang="en-US"/>
+            </a:p>
+          </p:txBody>
+        </p:sp>
+        <p:pic>
+          <p:nvPicPr>
+            <p:cNvPr id="6" name="图片 5">
+              <a:extLst>
+                <a:ext uri="{FF2B5EF4-FFF2-40B4-BE49-F238E27FC236}">
+                  <a16:creationId xmlns:a16="http://schemas.microsoft.com/office/drawing/2014/main" id="{B7B2F0C3-3D69-FBB1-F075-86125F633686}"/>
+                </a:ext>
+              </a:extLst>
+            </p:cNvPr>
+            <p:cNvPicPr>
+              <a:picLocks noChangeAspect="1"/>
+            </p:cNvPicPr>
+            <p:nvPr/>
+          </p:nvPicPr>
+          <p:blipFill>
+            <a:blip r:embed="rId3">
+              <a:extLst>
+                <a:ext uri="{28A0092B-C50C-407E-A947-70E740481C1C}">
+                  <a14:useLocalDpi xmlns:a14="http://schemas.microsoft.com/office/drawing/2010/main" val="0"/>
+                </a:ext>
+              </a:extLst>
+            </a:blip>
+            <a:stretch>
+              <a:fillRect/>
+            </a:stretch>
+          </p:blipFill>
+          <p:spPr>
+            <a:xfrm>
+              <a:off x="9577302" y="1165376"/>
+              <a:ext cx="1695878" cy="706616"/>
+            </a:xfrm>
+            <a:prstGeom prst="rect">
+              <a:avLst/>
+            </a:prstGeom>
+          </p:spPr>
+        </p:pic>
+      </p:grpSp>
     </p:spTree>
   </p:cSld>
   <p:clrMapOvr>
@@ -3969,6 +4076,113 @@
           </a:p>
         </p:txBody>
       </p:sp>
+      <p:grpSp>
+        <p:nvGrpSpPr>
+          <p:cNvPr id="4" name="组合 3">
+            <a:extLst>
+              <a:ext uri="{FF2B5EF4-FFF2-40B4-BE49-F238E27FC236}">
+                <a16:creationId xmlns:a16="http://schemas.microsoft.com/office/drawing/2014/main" id="{B10F0998-593C-1229-EF85-BF74A39DAEDB}"/>
+              </a:ext>
+            </a:extLst>
+          </p:cNvPr>
+          <p:cNvGrpSpPr/>
+          <p:nvPr/>
+        </p:nvGrpSpPr>
+        <p:grpSpPr>
+          <a:xfrm>
+            <a:off x="9577302" y="215877"/>
+            <a:ext cx="1695878" cy="706616"/>
+            <a:chOff x="9577302" y="1165376"/>
+            <a:chExt cx="1695878" cy="706616"/>
+          </a:xfrm>
+        </p:grpSpPr>
+        <p:sp>
+          <p:nvSpPr>
+            <p:cNvPr id="5" name="矩形 4">
+              <a:extLst>
+                <a:ext uri="{FF2B5EF4-FFF2-40B4-BE49-F238E27FC236}">
+                  <a16:creationId xmlns:a16="http://schemas.microsoft.com/office/drawing/2014/main" id="{1A9FBEB9-AEF8-632C-6BBF-CBEFF3CB7282}"/>
+                </a:ext>
+              </a:extLst>
+            </p:cNvPr>
+            <p:cNvSpPr/>
+            <p:nvPr/>
+          </p:nvSpPr>
+          <p:spPr>
+            <a:xfrm>
+              <a:off x="9721312" y="1295952"/>
+              <a:ext cx="1440100" cy="432030"/>
+            </a:xfrm>
+            <a:prstGeom prst="rect">
+              <a:avLst/>
+            </a:prstGeom>
+            <a:noFill/>
+            <a:ln>
+              <a:noFill/>
+            </a:ln>
+          </p:spPr>
+          <p:style>
+            <a:lnRef idx="2">
+              <a:schemeClr val="accent1">
+                <a:shade val="15000"/>
+              </a:schemeClr>
+            </a:lnRef>
+            <a:fillRef idx="1">
+              <a:schemeClr val="accent1"/>
+            </a:fillRef>
+            <a:effectRef idx="0">
+              <a:schemeClr val="accent1"/>
+            </a:effectRef>
+            <a:fontRef idx="minor">
+              <a:schemeClr val="lt1"/>
+            </a:fontRef>
+          </p:style>
+          <p:txBody>
+            <a:bodyPr rtlCol="0" anchor="ctr"/>
+            <a:lstStyle/>
+            <a:p>
+              <a:pPr algn="ctr"/>
+              <a:endParaRPr lang="zh-CN" altLang="en-US"/>
+            </a:p>
+          </p:txBody>
+        </p:sp>
+        <p:pic>
+          <p:nvPicPr>
+            <p:cNvPr id="6" name="图片 5">
+              <a:extLst>
+                <a:ext uri="{FF2B5EF4-FFF2-40B4-BE49-F238E27FC236}">
+                  <a16:creationId xmlns:a16="http://schemas.microsoft.com/office/drawing/2014/main" id="{BCC37DA1-4229-BBB2-ABC5-E7838760362B}"/>
+                </a:ext>
+              </a:extLst>
+            </p:cNvPr>
+            <p:cNvPicPr>
+              <a:picLocks noChangeAspect="1"/>
+            </p:cNvPicPr>
+            <p:nvPr/>
+          </p:nvPicPr>
+          <p:blipFill>
+            <a:blip r:embed="rId3">
+              <a:extLst>
+                <a:ext uri="{28A0092B-C50C-407E-A947-70E740481C1C}">
+                  <a14:useLocalDpi xmlns:a14="http://schemas.microsoft.com/office/drawing/2010/main" val="0"/>
+                </a:ext>
+              </a:extLst>
+            </a:blip>
+            <a:stretch>
+              <a:fillRect/>
+            </a:stretch>
+          </p:blipFill>
+          <p:spPr>
+            <a:xfrm>
+              <a:off x="9577302" y="1165376"/>
+              <a:ext cx="1695878" cy="706616"/>
+            </a:xfrm>
+            <a:prstGeom prst="rect">
+              <a:avLst/>
+            </a:prstGeom>
+          </p:spPr>
+        </p:pic>
+      </p:grpSp>
     </p:spTree>
     <p:extLst>
       <p:ext uri="{BB962C8B-B14F-4D97-AF65-F5344CB8AC3E}">
@@ -4182,6 +4396,113 @@
           </a:p>
         </p:txBody>
       </p:sp>
+      <p:grpSp>
+        <p:nvGrpSpPr>
+          <p:cNvPr id="4" name="组合 3">
+            <a:extLst>
+              <a:ext uri="{FF2B5EF4-FFF2-40B4-BE49-F238E27FC236}">
+                <a16:creationId xmlns:a16="http://schemas.microsoft.com/office/drawing/2014/main" id="{1705C1A7-D138-7FDA-B308-58D7A0B62F5C}"/>
+              </a:ext>
+            </a:extLst>
+          </p:cNvPr>
+          <p:cNvGrpSpPr/>
+          <p:nvPr/>
+        </p:nvGrpSpPr>
+        <p:grpSpPr>
+          <a:xfrm>
+            <a:off x="9577302" y="215877"/>
+            <a:ext cx="1695878" cy="706616"/>
+            <a:chOff x="9577302" y="1165376"/>
+            <a:chExt cx="1695878" cy="706616"/>
+          </a:xfrm>
+        </p:grpSpPr>
+        <p:sp>
+          <p:nvSpPr>
+            <p:cNvPr id="5" name="矩形 4">
+              <a:extLst>
+                <a:ext uri="{FF2B5EF4-FFF2-40B4-BE49-F238E27FC236}">
+                  <a16:creationId xmlns:a16="http://schemas.microsoft.com/office/drawing/2014/main" id="{1F9CE2FC-90F0-9534-83F7-FA2CB9F7FBDC}"/>
+                </a:ext>
+              </a:extLst>
+            </p:cNvPr>
+            <p:cNvSpPr/>
+            <p:nvPr/>
+          </p:nvSpPr>
+          <p:spPr>
+            <a:xfrm>
+              <a:off x="9721312" y="1295952"/>
+              <a:ext cx="1440100" cy="432030"/>
+            </a:xfrm>
+            <a:prstGeom prst="rect">
+              <a:avLst/>
+            </a:prstGeom>
+            <a:noFill/>
+            <a:ln>
+              <a:noFill/>
+            </a:ln>
+          </p:spPr>
+          <p:style>
+            <a:lnRef idx="2">
+              <a:schemeClr val="accent1">
+                <a:shade val="15000"/>
+              </a:schemeClr>
+            </a:lnRef>
+            <a:fillRef idx="1">
+              <a:schemeClr val="accent1"/>
+            </a:fillRef>
+            <a:effectRef idx="0">
+              <a:schemeClr val="accent1"/>
+            </a:effectRef>
+            <a:fontRef idx="minor">
+              <a:schemeClr val="lt1"/>
+            </a:fontRef>
+          </p:style>
+          <p:txBody>
+            <a:bodyPr rtlCol="0" anchor="ctr"/>
+            <a:lstStyle/>
+            <a:p>
+              <a:pPr algn="ctr"/>
+              <a:endParaRPr lang="zh-CN" altLang="en-US"/>
+            </a:p>
+          </p:txBody>
+        </p:sp>
+        <p:pic>
+          <p:nvPicPr>
+            <p:cNvPr id="6" name="图片 5">
+              <a:extLst>
+                <a:ext uri="{FF2B5EF4-FFF2-40B4-BE49-F238E27FC236}">
+                  <a16:creationId xmlns:a16="http://schemas.microsoft.com/office/drawing/2014/main" id="{4DCC6BCC-0275-8A91-8CD6-182FFC7E95CC}"/>
+                </a:ext>
+              </a:extLst>
+            </p:cNvPr>
+            <p:cNvPicPr>
+              <a:picLocks noChangeAspect="1"/>
+            </p:cNvPicPr>
+            <p:nvPr/>
+          </p:nvPicPr>
+          <p:blipFill>
+            <a:blip r:embed="rId3">
+              <a:extLst>
+                <a:ext uri="{28A0092B-C50C-407E-A947-70E740481C1C}">
+                  <a14:useLocalDpi xmlns:a14="http://schemas.microsoft.com/office/drawing/2010/main" val="0"/>
+                </a:ext>
+              </a:extLst>
+            </a:blip>
+            <a:stretch>
+              <a:fillRect/>
+            </a:stretch>
+          </p:blipFill>
+          <p:spPr>
+            <a:xfrm>
+              <a:off x="9577302" y="1165376"/>
+              <a:ext cx="1695878" cy="706616"/>
+            </a:xfrm>
+            <a:prstGeom prst="rect">
+              <a:avLst/>
+            </a:prstGeom>
+          </p:spPr>
+        </p:pic>
+      </p:grpSp>
     </p:spTree>
   </p:cSld>
   <p:clrMapOvr>
@@ -4354,6 +4675,113 @@
           </a:p>
         </p:txBody>
       </p:sp>
+      <p:grpSp>
+        <p:nvGrpSpPr>
+          <p:cNvPr id="4" name="组合 3">
+            <a:extLst>
+              <a:ext uri="{FF2B5EF4-FFF2-40B4-BE49-F238E27FC236}">
+                <a16:creationId xmlns:a16="http://schemas.microsoft.com/office/drawing/2014/main" id="{D9FEFEB8-0BF8-E544-6D21-AF3D92639F0A}"/>
+              </a:ext>
+            </a:extLst>
+          </p:cNvPr>
+          <p:cNvGrpSpPr/>
+          <p:nvPr/>
+        </p:nvGrpSpPr>
+        <p:grpSpPr>
+          <a:xfrm>
+            <a:off x="9577302" y="215877"/>
+            <a:ext cx="1695878" cy="706616"/>
+            <a:chOff x="9577302" y="1165376"/>
+            <a:chExt cx="1695878" cy="706616"/>
+          </a:xfrm>
+        </p:grpSpPr>
+        <p:sp>
+          <p:nvSpPr>
+            <p:cNvPr id="5" name="矩形 4">
+              <a:extLst>
+                <a:ext uri="{FF2B5EF4-FFF2-40B4-BE49-F238E27FC236}">
+                  <a16:creationId xmlns:a16="http://schemas.microsoft.com/office/drawing/2014/main" id="{529CAE23-E376-302E-F77B-F7A62C6BB621}"/>
+                </a:ext>
+              </a:extLst>
+            </p:cNvPr>
+            <p:cNvSpPr/>
+            <p:nvPr/>
+          </p:nvSpPr>
+          <p:spPr>
+            <a:xfrm>
+              <a:off x="9721312" y="1295952"/>
+              <a:ext cx="1440100" cy="432030"/>
+            </a:xfrm>
+            <a:prstGeom prst="rect">
+              <a:avLst/>
+            </a:prstGeom>
+            <a:noFill/>
+            <a:ln>
+              <a:noFill/>
+            </a:ln>
+          </p:spPr>
+          <p:style>
+            <a:lnRef idx="2">
+              <a:schemeClr val="accent1">
+                <a:shade val="15000"/>
+              </a:schemeClr>
+            </a:lnRef>
+            <a:fillRef idx="1">
+              <a:schemeClr val="accent1"/>
+            </a:fillRef>
+            <a:effectRef idx="0">
+              <a:schemeClr val="accent1"/>
+            </a:effectRef>
+            <a:fontRef idx="minor">
+              <a:schemeClr val="lt1"/>
+            </a:fontRef>
+          </p:style>
+          <p:txBody>
+            <a:bodyPr rtlCol="0" anchor="ctr"/>
+            <a:lstStyle/>
+            <a:p>
+              <a:pPr algn="ctr"/>
+              <a:endParaRPr lang="zh-CN" altLang="en-US"/>
+            </a:p>
+          </p:txBody>
+        </p:sp>
+        <p:pic>
+          <p:nvPicPr>
+            <p:cNvPr id="6" name="图片 5">
+              <a:extLst>
+                <a:ext uri="{FF2B5EF4-FFF2-40B4-BE49-F238E27FC236}">
+                  <a16:creationId xmlns:a16="http://schemas.microsoft.com/office/drawing/2014/main" id="{F831ACA2-309E-3679-0FD7-055F3379D71A}"/>
+                </a:ext>
+              </a:extLst>
+            </p:cNvPr>
+            <p:cNvPicPr>
+              <a:picLocks noChangeAspect="1"/>
+            </p:cNvPicPr>
+            <p:nvPr/>
+          </p:nvPicPr>
+          <p:blipFill>
+            <a:blip r:embed="rId3">
+              <a:extLst>
+                <a:ext uri="{28A0092B-C50C-407E-A947-70E740481C1C}">
+                  <a14:useLocalDpi xmlns:a14="http://schemas.microsoft.com/office/drawing/2010/main" val="0"/>
+                </a:ext>
+              </a:extLst>
+            </a:blip>
+            <a:stretch>
+              <a:fillRect/>
+            </a:stretch>
+          </p:blipFill>
+          <p:spPr>
+            <a:xfrm>
+              <a:off x="9577302" y="1165376"/>
+              <a:ext cx="1695878" cy="706616"/>
+            </a:xfrm>
+            <a:prstGeom prst="rect">
+              <a:avLst/>
+            </a:prstGeom>
+          </p:spPr>
+        </p:pic>
+      </p:grpSp>
     </p:spTree>
     <p:extLst>
       <p:ext uri="{BB962C8B-B14F-4D97-AF65-F5344CB8AC3E}">
@@ -4531,6 +4959,113 @@
           </a:p>
         </p:txBody>
       </p:sp>
+      <p:grpSp>
+        <p:nvGrpSpPr>
+          <p:cNvPr id="4" name="组合 3">
+            <a:extLst>
+              <a:ext uri="{FF2B5EF4-FFF2-40B4-BE49-F238E27FC236}">
+                <a16:creationId xmlns:a16="http://schemas.microsoft.com/office/drawing/2014/main" id="{70C836B0-A977-2379-8FB0-87DBC61BB1E6}"/>
+              </a:ext>
+            </a:extLst>
+          </p:cNvPr>
+          <p:cNvGrpSpPr/>
+          <p:nvPr/>
+        </p:nvGrpSpPr>
+        <p:grpSpPr>
+          <a:xfrm>
+            <a:off x="9577302" y="215877"/>
+            <a:ext cx="1695878" cy="706616"/>
+            <a:chOff x="9577302" y="1165376"/>
+            <a:chExt cx="1695878" cy="706616"/>
+          </a:xfrm>
+        </p:grpSpPr>
+        <p:sp>
+          <p:nvSpPr>
+            <p:cNvPr id="5" name="矩形 4">
+              <a:extLst>
+                <a:ext uri="{FF2B5EF4-FFF2-40B4-BE49-F238E27FC236}">
+                  <a16:creationId xmlns:a16="http://schemas.microsoft.com/office/drawing/2014/main" id="{3B87B74E-8FFF-7B10-C68A-5FBF6BA452FF}"/>
+                </a:ext>
+              </a:extLst>
+            </p:cNvPr>
+            <p:cNvSpPr/>
+            <p:nvPr/>
+          </p:nvSpPr>
+          <p:spPr>
+            <a:xfrm>
+              <a:off x="9721312" y="1295952"/>
+              <a:ext cx="1440100" cy="432030"/>
+            </a:xfrm>
+            <a:prstGeom prst="rect">
+              <a:avLst/>
+            </a:prstGeom>
+            <a:noFill/>
+            <a:ln>
+              <a:noFill/>
+            </a:ln>
+          </p:spPr>
+          <p:style>
+            <a:lnRef idx="2">
+              <a:schemeClr val="accent1">
+                <a:shade val="15000"/>
+              </a:schemeClr>
+            </a:lnRef>
+            <a:fillRef idx="1">
+              <a:schemeClr val="accent1"/>
+            </a:fillRef>
+            <a:effectRef idx="0">
+              <a:schemeClr val="accent1"/>
+            </a:effectRef>
+            <a:fontRef idx="minor">
+              <a:schemeClr val="lt1"/>
+            </a:fontRef>
+          </p:style>
+          <p:txBody>
+            <a:bodyPr rtlCol="0" anchor="ctr"/>
+            <a:lstStyle/>
+            <a:p>
+              <a:pPr algn="ctr"/>
+              <a:endParaRPr lang="zh-CN" altLang="en-US"/>
+            </a:p>
+          </p:txBody>
+        </p:sp>
+        <p:pic>
+          <p:nvPicPr>
+            <p:cNvPr id="6" name="图片 5">
+              <a:extLst>
+                <a:ext uri="{FF2B5EF4-FFF2-40B4-BE49-F238E27FC236}">
+                  <a16:creationId xmlns:a16="http://schemas.microsoft.com/office/drawing/2014/main" id="{A39649FE-1E65-86FE-C63D-CC915B51FE73}"/>
+                </a:ext>
+              </a:extLst>
+            </p:cNvPr>
+            <p:cNvPicPr>
+              <a:picLocks noChangeAspect="1"/>
+            </p:cNvPicPr>
+            <p:nvPr/>
+          </p:nvPicPr>
+          <p:blipFill>
+            <a:blip r:embed="rId3">
+              <a:extLst>
+                <a:ext uri="{28A0092B-C50C-407E-A947-70E740481C1C}">
+                  <a14:useLocalDpi xmlns:a14="http://schemas.microsoft.com/office/drawing/2010/main" val="0"/>
+                </a:ext>
+              </a:extLst>
+            </a:blip>
+            <a:stretch>
+              <a:fillRect/>
+            </a:stretch>
+          </p:blipFill>
+          <p:spPr>
+            <a:xfrm>
+              <a:off x="9577302" y="1165376"/>
+              <a:ext cx="1695878" cy="706616"/>
+            </a:xfrm>
+            <a:prstGeom prst="rect">
+              <a:avLst/>
+            </a:prstGeom>
+          </p:spPr>
+        </p:pic>
+      </p:grpSp>
     </p:spTree>
     <p:extLst>
       <p:ext uri="{BB962C8B-B14F-4D97-AF65-F5344CB8AC3E}">
@@ -4708,6 +5243,113 @@
           </a:p>
         </p:txBody>
       </p:sp>
+      <p:grpSp>
+        <p:nvGrpSpPr>
+          <p:cNvPr id="4" name="组合 3">
+            <a:extLst>
+              <a:ext uri="{FF2B5EF4-FFF2-40B4-BE49-F238E27FC236}">
+                <a16:creationId xmlns:a16="http://schemas.microsoft.com/office/drawing/2014/main" id="{6F024335-7864-9FA9-F840-0AABE881D1C8}"/>
+              </a:ext>
+            </a:extLst>
+          </p:cNvPr>
+          <p:cNvGrpSpPr/>
+          <p:nvPr/>
+        </p:nvGrpSpPr>
+        <p:grpSpPr>
+          <a:xfrm>
+            <a:off x="9577302" y="215877"/>
+            <a:ext cx="1695878" cy="706616"/>
+            <a:chOff x="9577302" y="1165376"/>
+            <a:chExt cx="1695878" cy="706616"/>
+          </a:xfrm>
+        </p:grpSpPr>
+        <p:sp>
+          <p:nvSpPr>
+            <p:cNvPr id="5" name="矩形 4">
+              <a:extLst>
+                <a:ext uri="{FF2B5EF4-FFF2-40B4-BE49-F238E27FC236}">
+                  <a16:creationId xmlns:a16="http://schemas.microsoft.com/office/drawing/2014/main" id="{4A000707-F750-127D-BCB9-67290F65EAB6}"/>
+                </a:ext>
+              </a:extLst>
+            </p:cNvPr>
+            <p:cNvSpPr/>
+            <p:nvPr/>
+          </p:nvSpPr>
+          <p:spPr>
+            <a:xfrm>
+              <a:off x="9721312" y="1295952"/>
+              <a:ext cx="1440100" cy="432030"/>
+            </a:xfrm>
+            <a:prstGeom prst="rect">
+              <a:avLst/>
+            </a:prstGeom>
+            <a:noFill/>
+            <a:ln>
+              <a:noFill/>
+            </a:ln>
+          </p:spPr>
+          <p:style>
+            <a:lnRef idx="2">
+              <a:schemeClr val="accent1">
+                <a:shade val="15000"/>
+              </a:schemeClr>
+            </a:lnRef>
+            <a:fillRef idx="1">
+              <a:schemeClr val="accent1"/>
+            </a:fillRef>
+            <a:effectRef idx="0">
+              <a:schemeClr val="accent1"/>
+            </a:effectRef>
+            <a:fontRef idx="minor">
+              <a:schemeClr val="lt1"/>
+            </a:fontRef>
+          </p:style>
+          <p:txBody>
+            <a:bodyPr rtlCol="0" anchor="ctr"/>
+            <a:lstStyle/>
+            <a:p>
+              <a:pPr algn="ctr"/>
+              <a:endParaRPr lang="zh-CN" altLang="en-US"/>
+            </a:p>
+          </p:txBody>
+        </p:sp>
+        <p:pic>
+          <p:nvPicPr>
+            <p:cNvPr id="6" name="图片 5">
+              <a:extLst>
+                <a:ext uri="{FF2B5EF4-FFF2-40B4-BE49-F238E27FC236}">
+                  <a16:creationId xmlns:a16="http://schemas.microsoft.com/office/drawing/2014/main" id="{A2FDB5CC-0BC0-32D3-9FE7-3D279025809D}"/>
+                </a:ext>
+              </a:extLst>
+            </p:cNvPr>
+            <p:cNvPicPr>
+              <a:picLocks noChangeAspect="1"/>
+            </p:cNvPicPr>
+            <p:nvPr/>
+          </p:nvPicPr>
+          <p:blipFill>
+            <a:blip r:embed="rId3">
+              <a:extLst>
+                <a:ext uri="{28A0092B-C50C-407E-A947-70E740481C1C}">
+                  <a14:useLocalDpi xmlns:a14="http://schemas.microsoft.com/office/drawing/2010/main" val="0"/>
+                </a:ext>
+              </a:extLst>
+            </a:blip>
+            <a:stretch>
+              <a:fillRect/>
+            </a:stretch>
+          </p:blipFill>
+          <p:spPr>
+            <a:xfrm>
+              <a:off x="9577302" y="1165376"/>
+              <a:ext cx="1695878" cy="706616"/>
+            </a:xfrm>
+            <a:prstGeom prst="rect">
+              <a:avLst/>
+            </a:prstGeom>
+          </p:spPr>
+        </p:pic>
+      </p:grpSp>
     </p:spTree>
     <p:extLst>
       <p:ext uri="{BB962C8B-B14F-4D97-AF65-F5344CB8AC3E}">
@@ -4896,6 +5538,113 @@
           </a:p>
         </p:txBody>
       </p:sp>
+      <p:grpSp>
+        <p:nvGrpSpPr>
+          <p:cNvPr id="4" name="组合 3">
+            <a:extLst>
+              <a:ext uri="{FF2B5EF4-FFF2-40B4-BE49-F238E27FC236}">
+                <a16:creationId xmlns:a16="http://schemas.microsoft.com/office/drawing/2014/main" id="{4A3556C2-3B32-86C2-FC70-9964304E713F}"/>
+              </a:ext>
+            </a:extLst>
+          </p:cNvPr>
+          <p:cNvGrpSpPr/>
+          <p:nvPr/>
+        </p:nvGrpSpPr>
+        <p:grpSpPr>
+          <a:xfrm>
+            <a:off x="9577302" y="215877"/>
+            <a:ext cx="1695878" cy="706616"/>
+            <a:chOff x="9577302" y="1165376"/>
+            <a:chExt cx="1695878" cy="706616"/>
+          </a:xfrm>
+        </p:grpSpPr>
+        <p:sp>
+          <p:nvSpPr>
+            <p:cNvPr id="5" name="矩形 4">
+              <a:extLst>
+                <a:ext uri="{FF2B5EF4-FFF2-40B4-BE49-F238E27FC236}">
+                  <a16:creationId xmlns:a16="http://schemas.microsoft.com/office/drawing/2014/main" id="{55740A57-9BA7-00EF-46F0-5103297DD833}"/>
+                </a:ext>
+              </a:extLst>
+            </p:cNvPr>
+            <p:cNvSpPr/>
+            <p:nvPr/>
+          </p:nvSpPr>
+          <p:spPr>
+            <a:xfrm>
+              <a:off x="9721312" y="1295952"/>
+              <a:ext cx="1440100" cy="432030"/>
+            </a:xfrm>
+            <a:prstGeom prst="rect">
+              <a:avLst/>
+            </a:prstGeom>
+            <a:noFill/>
+            <a:ln>
+              <a:noFill/>
+            </a:ln>
+          </p:spPr>
+          <p:style>
+            <a:lnRef idx="2">
+              <a:schemeClr val="accent1">
+                <a:shade val="15000"/>
+              </a:schemeClr>
+            </a:lnRef>
+            <a:fillRef idx="1">
+              <a:schemeClr val="accent1"/>
+            </a:fillRef>
+            <a:effectRef idx="0">
+              <a:schemeClr val="accent1"/>
+            </a:effectRef>
+            <a:fontRef idx="minor">
+              <a:schemeClr val="lt1"/>
+            </a:fontRef>
+          </p:style>
+          <p:txBody>
+            <a:bodyPr rtlCol="0" anchor="ctr"/>
+            <a:lstStyle/>
+            <a:p>
+              <a:pPr algn="ctr"/>
+              <a:endParaRPr lang="zh-CN" altLang="en-US"/>
+            </a:p>
+          </p:txBody>
+        </p:sp>
+        <p:pic>
+          <p:nvPicPr>
+            <p:cNvPr id="6" name="图片 5">
+              <a:extLst>
+                <a:ext uri="{FF2B5EF4-FFF2-40B4-BE49-F238E27FC236}">
+                  <a16:creationId xmlns:a16="http://schemas.microsoft.com/office/drawing/2014/main" id="{DAE5511C-3355-F78A-AB3D-59A798D9F7BF}"/>
+                </a:ext>
+              </a:extLst>
+            </p:cNvPr>
+            <p:cNvPicPr>
+              <a:picLocks noChangeAspect="1"/>
+            </p:cNvPicPr>
+            <p:nvPr/>
+          </p:nvPicPr>
+          <p:blipFill>
+            <a:blip r:embed="rId3">
+              <a:extLst>
+                <a:ext uri="{28A0092B-C50C-407E-A947-70E740481C1C}">
+                  <a14:useLocalDpi xmlns:a14="http://schemas.microsoft.com/office/drawing/2010/main" val="0"/>
+                </a:ext>
+              </a:extLst>
+            </a:blip>
+            <a:stretch>
+              <a:fillRect/>
+            </a:stretch>
+          </p:blipFill>
+          <p:spPr>
+            <a:xfrm>
+              <a:off x="9577302" y="1165376"/>
+              <a:ext cx="1695878" cy="706616"/>
+            </a:xfrm>
+            <a:prstGeom prst="rect">
+              <a:avLst/>
+            </a:prstGeom>
+          </p:spPr>
+        </p:pic>
+      </p:grpSp>
     </p:spTree>
     <p:extLst>
       <p:ext uri="{BB962C8B-B14F-4D97-AF65-F5344CB8AC3E}">
@@ -5073,6 +5822,113 @@
           </a:p>
         </p:txBody>
       </p:sp>
+      <p:grpSp>
+        <p:nvGrpSpPr>
+          <p:cNvPr id="4" name="组合 3">
+            <a:extLst>
+              <a:ext uri="{FF2B5EF4-FFF2-40B4-BE49-F238E27FC236}">
+                <a16:creationId xmlns:a16="http://schemas.microsoft.com/office/drawing/2014/main" id="{531370B8-E759-C151-818A-4DD7C0F91F1F}"/>
+              </a:ext>
+            </a:extLst>
+          </p:cNvPr>
+          <p:cNvGrpSpPr/>
+          <p:nvPr/>
+        </p:nvGrpSpPr>
+        <p:grpSpPr>
+          <a:xfrm>
+            <a:off x="9577302" y="215877"/>
+            <a:ext cx="1695878" cy="706616"/>
+            <a:chOff x="9577302" y="1165376"/>
+            <a:chExt cx="1695878" cy="706616"/>
+          </a:xfrm>
+        </p:grpSpPr>
+        <p:sp>
+          <p:nvSpPr>
+            <p:cNvPr id="5" name="矩形 4">
+              <a:extLst>
+                <a:ext uri="{FF2B5EF4-FFF2-40B4-BE49-F238E27FC236}">
+                  <a16:creationId xmlns:a16="http://schemas.microsoft.com/office/drawing/2014/main" id="{9125D2F1-A76F-23D0-48F0-187A6268AD89}"/>
+                </a:ext>
+              </a:extLst>
+            </p:cNvPr>
+            <p:cNvSpPr/>
+            <p:nvPr/>
+          </p:nvSpPr>
+          <p:spPr>
+            <a:xfrm>
+              <a:off x="9721312" y="1295952"/>
+              <a:ext cx="1440100" cy="432030"/>
+            </a:xfrm>
+            <a:prstGeom prst="rect">
+              <a:avLst/>
+            </a:prstGeom>
+            <a:noFill/>
+            <a:ln>
+              <a:noFill/>
+            </a:ln>
+          </p:spPr>
+          <p:style>
+            <a:lnRef idx="2">
+              <a:schemeClr val="accent1">
+                <a:shade val="15000"/>
+              </a:schemeClr>
+            </a:lnRef>
+            <a:fillRef idx="1">
+              <a:schemeClr val="accent1"/>
+            </a:fillRef>
+            <a:effectRef idx="0">
+              <a:schemeClr val="accent1"/>
+            </a:effectRef>
+            <a:fontRef idx="minor">
+              <a:schemeClr val="lt1"/>
+            </a:fontRef>
+          </p:style>
+          <p:txBody>
+            <a:bodyPr rtlCol="0" anchor="ctr"/>
+            <a:lstStyle/>
+            <a:p>
+              <a:pPr algn="ctr"/>
+              <a:endParaRPr lang="zh-CN" altLang="en-US"/>
+            </a:p>
+          </p:txBody>
+        </p:sp>
+        <p:pic>
+          <p:nvPicPr>
+            <p:cNvPr id="6" name="图片 5">
+              <a:extLst>
+                <a:ext uri="{FF2B5EF4-FFF2-40B4-BE49-F238E27FC236}">
+                  <a16:creationId xmlns:a16="http://schemas.microsoft.com/office/drawing/2014/main" id="{942E8633-A220-4E06-D55D-2C09A969E9C5}"/>
+                </a:ext>
+              </a:extLst>
+            </p:cNvPr>
+            <p:cNvPicPr>
+              <a:picLocks noChangeAspect="1"/>
+            </p:cNvPicPr>
+            <p:nvPr/>
+          </p:nvPicPr>
+          <p:blipFill>
+            <a:blip r:embed="rId3">
+              <a:extLst>
+                <a:ext uri="{28A0092B-C50C-407E-A947-70E740481C1C}">
+                  <a14:useLocalDpi xmlns:a14="http://schemas.microsoft.com/office/drawing/2010/main" val="0"/>
+                </a:ext>
+              </a:extLst>
+            </a:blip>
+            <a:stretch>
+              <a:fillRect/>
+            </a:stretch>
+          </p:blipFill>
+          <p:spPr>
+            <a:xfrm>
+              <a:off x="9577302" y="1165376"/>
+              <a:ext cx="1695878" cy="706616"/>
+            </a:xfrm>
+            <a:prstGeom prst="rect">
+              <a:avLst/>
+            </a:prstGeom>
+          </p:spPr>
+        </p:pic>
+      </p:grpSp>
     </p:spTree>
     <p:extLst>
       <p:ext uri="{BB962C8B-B14F-4D97-AF65-F5344CB8AC3E}">
@@ -5251,6 +6107,113 @@
           </a:p>
         </p:txBody>
       </p:sp>
+      <p:grpSp>
+        <p:nvGrpSpPr>
+          <p:cNvPr id="4" name="组合 3">
+            <a:extLst>
+              <a:ext uri="{FF2B5EF4-FFF2-40B4-BE49-F238E27FC236}">
+                <a16:creationId xmlns:a16="http://schemas.microsoft.com/office/drawing/2014/main" id="{692148AE-76D4-54EE-CB5F-BF45D89EC8B8}"/>
+              </a:ext>
+            </a:extLst>
+          </p:cNvPr>
+          <p:cNvGrpSpPr/>
+          <p:nvPr/>
+        </p:nvGrpSpPr>
+        <p:grpSpPr>
+          <a:xfrm>
+            <a:off x="9577302" y="215877"/>
+            <a:ext cx="1695878" cy="706616"/>
+            <a:chOff x="9577302" y="1165376"/>
+            <a:chExt cx="1695878" cy="706616"/>
+          </a:xfrm>
+        </p:grpSpPr>
+        <p:sp>
+          <p:nvSpPr>
+            <p:cNvPr id="5" name="矩形 4">
+              <a:extLst>
+                <a:ext uri="{FF2B5EF4-FFF2-40B4-BE49-F238E27FC236}">
+                  <a16:creationId xmlns:a16="http://schemas.microsoft.com/office/drawing/2014/main" id="{E1A00CE8-CC73-52F1-EA60-2A1B70787BE0}"/>
+                </a:ext>
+              </a:extLst>
+            </p:cNvPr>
+            <p:cNvSpPr/>
+            <p:nvPr/>
+          </p:nvSpPr>
+          <p:spPr>
+            <a:xfrm>
+              <a:off x="9721312" y="1295952"/>
+              <a:ext cx="1440100" cy="432030"/>
+            </a:xfrm>
+            <a:prstGeom prst="rect">
+              <a:avLst/>
+            </a:prstGeom>
+            <a:noFill/>
+            <a:ln>
+              <a:noFill/>
+            </a:ln>
+          </p:spPr>
+          <p:style>
+            <a:lnRef idx="2">
+              <a:schemeClr val="accent1">
+                <a:shade val="15000"/>
+              </a:schemeClr>
+            </a:lnRef>
+            <a:fillRef idx="1">
+              <a:schemeClr val="accent1"/>
+            </a:fillRef>
+            <a:effectRef idx="0">
+              <a:schemeClr val="accent1"/>
+            </a:effectRef>
+            <a:fontRef idx="minor">
+              <a:schemeClr val="lt1"/>
+            </a:fontRef>
+          </p:style>
+          <p:txBody>
+            <a:bodyPr rtlCol="0" anchor="ctr"/>
+            <a:lstStyle/>
+            <a:p>
+              <a:pPr algn="ctr"/>
+              <a:endParaRPr lang="zh-CN" altLang="en-US"/>
+            </a:p>
+          </p:txBody>
+        </p:sp>
+        <p:pic>
+          <p:nvPicPr>
+            <p:cNvPr id="6" name="图片 5">
+              <a:extLst>
+                <a:ext uri="{FF2B5EF4-FFF2-40B4-BE49-F238E27FC236}">
+                  <a16:creationId xmlns:a16="http://schemas.microsoft.com/office/drawing/2014/main" id="{09FC4F66-D161-70B5-0145-9158C2EA8F95}"/>
+                </a:ext>
+              </a:extLst>
+            </p:cNvPr>
+            <p:cNvPicPr>
+              <a:picLocks noChangeAspect="1"/>
+            </p:cNvPicPr>
+            <p:nvPr/>
+          </p:nvPicPr>
+          <p:blipFill>
+            <a:blip r:embed="rId3">
+              <a:extLst>
+                <a:ext uri="{28A0092B-C50C-407E-A947-70E740481C1C}">
+                  <a14:useLocalDpi xmlns:a14="http://schemas.microsoft.com/office/drawing/2010/main" val="0"/>
+                </a:ext>
+              </a:extLst>
+            </a:blip>
+            <a:stretch>
+              <a:fillRect/>
+            </a:stretch>
+          </p:blipFill>
+          <p:spPr>
+            <a:xfrm>
+              <a:off x="9577302" y="1165376"/>
+              <a:ext cx="1695878" cy="706616"/>
+            </a:xfrm>
+            <a:prstGeom prst="rect">
+              <a:avLst/>
+            </a:prstGeom>
+          </p:spPr>
+        </p:pic>
+      </p:grpSp>
     </p:spTree>
     <p:extLst>
       <p:ext uri="{BB962C8B-B14F-4D97-AF65-F5344CB8AC3E}">
@@ -5429,6 +6392,113 @@
           </a:p>
         </p:txBody>
       </p:sp>
+      <p:grpSp>
+        <p:nvGrpSpPr>
+          <p:cNvPr id="4" name="组合 3">
+            <a:extLst>
+              <a:ext uri="{FF2B5EF4-FFF2-40B4-BE49-F238E27FC236}">
+                <a16:creationId xmlns:a16="http://schemas.microsoft.com/office/drawing/2014/main" id="{8BE05B08-12EE-0319-6BA9-4B66BD15056B}"/>
+              </a:ext>
+            </a:extLst>
+          </p:cNvPr>
+          <p:cNvGrpSpPr/>
+          <p:nvPr/>
+        </p:nvGrpSpPr>
+        <p:grpSpPr>
+          <a:xfrm>
+            <a:off x="9577302" y="215877"/>
+            <a:ext cx="1695878" cy="706616"/>
+            <a:chOff x="9577302" y="1165376"/>
+            <a:chExt cx="1695878" cy="706616"/>
+          </a:xfrm>
+        </p:grpSpPr>
+        <p:sp>
+          <p:nvSpPr>
+            <p:cNvPr id="5" name="矩形 4">
+              <a:extLst>
+                <a:ext uri="{FF2B5EF4-FFF2-40B4-BE49-F238E27FC236}">
+                  <a16:creationId xmlns:a16="http://schemas.microsoft.com/office/drawing/2014/main" id="{027C688C-9AF8-4B87-EF26-588F28B1FC2A}"/>
+                </a:ext>
+              </a:extLst>
+            </p:cNvPr>
+            <p:cNvSpPr/>
+            <p:nvPr/>
+          </p:nvSpPr>
+          <p:spPr>
+            <a:xfrm>
+              <a:off x="9721312" y="1295952"/>
+              <a:ext cx="1440100" cy="432030"/>
+            </a:xfrm>
+            <a:prstGeom prst="rect">
+              <a:avLst/>
+            </a:prstGeom>
+            <a:noFill/>
+            <a:ln>
+              <a:noFill/>
+            </a:ln>
+          </p:spPr>
+          <p:style>
+            <a:lnRef idx="2">
+              <a:schemeClr val="accent1">
+                <a:shade val="15000"/>
+              </a:schemeClr>
+            </a:lnRef>
+            <a:fillRef idx="1">
+              <a:schemeClr val="accent1"/>
+            </a:fillRef>
+            <a:effectRef idx="0">
+              <a:schemeClr val="accent1"/>
+            </a:effectRef>
+            <a:fontRef idx="minor">
+              <a:schemeClr val="lt1"/>
+            </a:fontRef>
+          </p:style>
+          <p:txBody>
+            <a:bodyPr rtlCol="0" anchor="ctr"/>
+            <a:lstStyle/>
+            <a:p>
+              <a:pPr algn="ctr"/>
+              <a:endParaRPr lang="zh-CN" altLang="en-US"/>
+            </a:p>
+          </p:txBody>
+        </p:sp>
+        <p:pic>
+          <p:nvPicPr>
+            <p:cNvPr id="6" name="图片 5">
+              <a:extLst>
+                <a:ext uri="{FF2B5EF4-FFF2-40B4-BE49-F238E27FC236}">
+                  <a16:creationId xmlns:a16="http://schemas.microsoft.com/office/drawing/2014/main" id="{1BC74993-EA92-B94F-E195-8FBDE206D468}"/>
+                </a:ext>
+              </a:extLst>
+            </p:cNvPr>
+            <p:cNvPicPr>
+              <a:picLocks noChangeAspect="1"/>
+            </p:cNvPicPr>
+            <p:nvPr/>
+          </p:nvPicPr>
+          <p:blipFill>
+            <a:blip r:embed="rId3">
+              <a:extLst>
+                <a:ext uri="{28A0092B-C50C-407E-A947-70E740481C1C}">
+                  <a14:useLocalDpi xmlns:a14="http://schemas.microsoft.com/office/drawing/2010/main" val="0"/>
+                </a:ext>
+              </a:extLst>
+            </a:blip>
+            <a:stretch>
+              <a:fillRect/>
+            </a:stretch>
+          </p:blipFill>
+          <p:spPr>
+            <a:xfrm>
+              <a:off x="9577302" y="1165376"/>
+              <a:ext cx="1695878" cy="706616"/>
+            </a:xfrm>
+            <a:prstGeom prst="rect">
+              <a:avLst/>
+            </a:prstGeom>
+          </p:spPr>
+        </p:pic>
+      </p:grpSp>
     </p:spTree>
     <p:extLst>
       <p:ext uri="{BB962C8B-B14F-4D97-AF65-F5344CB8AC3E}">

--- a/ppt_engine/templates/solution_fixed_modules/M3_项目深化方案模板_最终版本.pptx
+++ b/ppt_engine/templates/solution_fixed_modules/M3_项目深化方案模板_最终版本.pptx
@@ -5,27 +5,26 @@
     <p:sldMasterId id="2147483648" r:id="rId1"/>
   </p:sldMasterIdLst>
   <p:notesMasterIdLst>
-    <p:notesMasterId r:id="rId12"/>
+    <p:notesMasterId r:id="rId11"/>
   </p:notesMasterIdLst>
   <p:handoutMasterIdLst>
-    <p:handoutMasterId r:id="rId13"/>
+    <p:handoutMasterId r:id="rId12"/>
   </p:handoutMasterIdLst>
   <p:sldIdLst>
-    <p:sldId id="4375" r:id="rId2"/>
-    <p:sldId id="4376" r:id="rId3"/>
-    <p:sldId id="5200" r:id="rId4"/>
-    <p:sldId id="5201" r:id="rId5"/>
-    <p:sldId id="5202" r:id="rId6"/>
-    <p:sldId id="5203" r:id="rId7"/>
-    <p:sldId id="5204" r:id="rId8"/>
-    <p:sldId id="5205" r:id="rId9"/>
-    <p:sldId id="5206" r:id="rId10"/>
-    <p:sldId id="5207" r:id="rId11"/>
+    <p:sldId id="4376" r:id="rId2"/>
+    <p:sldId id="5200" r:id="rId3"/>
+    <p:sldId id="5201" r:id="rId4"/>
+    <p:sldId id="5202" r:id="rId5"/>
+    <p:sldId id="5203" r:id="rId6"/>
+    <p:sldId id="5204" r:id="rId7"/>
+    <p:sldId id="5205" r:id="rId8"/>
+    <p:sldId id="5206" r:id="rId9"/>
+    <p:sldId id="5207" r:id="rId10"/>
   </p:sldIdLst>
   <p:sldSz cx="11522075" cy="6480175"/>
   <p:notesSz cx="6797675" cy="9926638"/>
   <p:custDataLst>
-    <p:tags r:id="rId14"/>
+    <p:tags r:id="rId13"/>
   </p:custDataLst>
   <p:defaultTextStyle>
     <a:defPPr>
@@ -225,9 +224,7 @@
     <p:ext uri="{521415D9-36F7-43E2-AB2F-B90AF26B5E84}">
       <p14:sectionLst xmlns:p14="http://schemas.microsoft.com/office/powerpoint/2010/main">
         <p14:section name="默认节" id="{ED0C4620-9916-480A-93A0-007A6205049B}">
-          <p14:sldIdLst>
-            <p14:sldId id="4375"/>
-          </p14:sldIdLst>
+          <p14:sldIdLst/>
         </p14:section>
         <p14:section name="默认节" id="{93327E70-49BC-45F7-B959-D8DD71B44DFC}">
           <p14:sldIdLst>
@@ -446,7 +443,7 @@
                 <a:cs typeface="+mn-cs"/>
                 <a:sym typeface="等线" panose="02010600030101010101" pitchFamily="2" charset="-122"/>
               </a:rPr>
-              <a:t>2026/5/26</a:t>
+              <a:t>2026/5/27</a:t>
             </a:fld>
             <a:endParaRPr kumimoji="0" lang="zh-CN" altLang="en-US" sz="1200" b="0" i="0" u="none" strike="noStrike" kern="1200" cap="none" spc="0" normalizeH="0" baseline="0" noProof="1">
               <a:ln>
@@ -895,7 +892,665 @@
 </p:notes>
 </file>
 
-<file path=ppt/notesSlides/notesSlide10.xml><?xml version="1.0" encoding="utf-8"?>
+<file path=ppt/notesSlides/notesSlide2.xml><?xml version="1.0" encoding="utf-8"?>
+<p:notes xmlns:a="http://schemas.openxmlformats.org/drawingml/2006/main" xmlns:r="http://schemas.openxmlformats.org/officeDocument/2006/relationships" xmlns:p="http://schemas.openxmlformats.org/presentationml/2006/main">
+  <p:cSld>
+    <p:spTree>
+      <p:nvGrpSpPr>
+        <p:cNvPr id="1" name="">
+          <a:extLst>
+            <a:ext uri="{FF2B5EF4-FFF2-40B4-BE49-F238E27FC236}">
+              <a16:creationId xmlns:a16="http://schemas.microsoft.com/office/drawing/2014/main" id="{A16C4CC4-C66A-6053-03D1-9429C9351E30}"/>
+            </a:ext>
+          </a:extLst>
+        </p:cNvPr>
+        <p:cNvGrpSpPr/>
+        <p:nvPr/>
+      </p:nvGrpSpPr>
+      <p:grpSpPr>
+        <a:xfrm>
+          <a:off x="0" y="0"/>
+          <a:ext cx="0" cy="0"/>
+          <a:chOff x="0" y="0"/>
+          <a:chExt cx="0" cy="0"/>
+        </a:xfrm>
+      </p:grpSpPr>
+      <p:sp>
+        <p:nvSpPr>
+          <p:cNvPr id="2" name="幻灯片图像占位符 1">
+            <a:extLst>
+              <a:ext uri="{FF2B5EF4-FFF2-40B4-BE49-F238E27FC236}">
+                <a16:creationId xmlns:a16="http://schemas.microsoft.com/office/drawing/2014/main" id="{22AE7059-F8F9-A7DE-128B-83B5FD873970}"/>
+              </a:ext>
+            </a:extLst>
+          </p:cNvPr>
+          <p:cNvSpPr>
+            <a:spLocks noGrp="1" noRot="1" noChangeAspect="1"/>
+          </p:cNvSpPr>
+          <p:nvPr>
+            <p:ph type="sldImg"/>
+          </p:nvPr>
+        </p:nvSpPr>
+        <p:spPr/>
+      </p:sp>
+      <p:sp>
+        <p:nvSpPr>
+          <p:cNvPr id="3" name="文本占位符 2">
+            <a:extLst>
+              <a:ext uri="{FF2B5EF4-FFF2-40B4-BE49-F238E27FC236}">
+                <a16:creationId xmlns:a16="http://schemas.microsoft.com/office/drawing/2014/main" id="{FD18A9CE-6068-9154-715B-C8AA934F55F8}"/>
+              </a:ext>
+            </a:extLst>
+          </p:cNvPr>
+          <p:cNvSpPr>
+            <a:spLocks noGrp="1"/>
+          </p:cNvSpPr>
+          <p:nvPr>
+            <p:ph type="body" idx="1"/>
+          </p:nvPr>
+        </p:nvSpPr>
+        <p:spPr/>
+        <p:txBody>
+          <a:bodyPr/>
+          <a:lstStyle/>
+          <a:p>
+            <a:r>
+              <a:rPr lang="zh-CN" altLang="en-US"/>
+              <a:t>施工线路长，声屏障高度高，结构型式多，工程体量大，占道施工。</a:t>
+            </a:r>
+          </a:p>
+          <a:p>
+            <a:endParaRPr lang="zh-CN" altLang="en-US"/>
+          </a:p>
+          <a:p>
+            <a:endParaRPr lang="zh-CN" altLang="en-US"/>
+          </a:p>
+          <a:p>
+            <a:endParaRPr lang="zh-CN" altLang="en-US"/>
+          </a:p>
+          <a:p>
+            <a:endParaRPr lang="zh-CN" altLang="en-US"/>
+          </a:p>
+        </p:txBody>
+      </p:sp>
+    </p:spTree>
+    <p:extLst>
+      <p:ext uri="{BB962C8B-B14F-4D97-AF65-F5344CB8AC3E}">
+        <p14:creationId xmlns:p14="http://schemas.microsoft.com/office/powerpoint/2010/main" val="115977314"/>
+      </p:ext>
+    </p:extLst>
+  </p:cSld>
+  <p:clrMapOvr>
+    <a:masterClrMapping/>
+  </p:clrMapOvr>
+</p:notes>
+</file>
+
+<file path=ppt/notesSlides/notesSlide3.xml><?xml version="1.0" encoding="utf-8"?>
+<p:notes xmlns:a="http://schemas.openxmlformats.org/drawingml/2006/main" xmlns:r="http://schemas.openxmlformats.org/officeDocument/2006/relationships" xmlns:p="http://schemas.openxmlformats.org/presentationml/2006/main">
+  <p:cSld>
+    <p:spTree>
+      <p:nvGrpSpPr>
+        <p:cNvPr id="1" name="">
+          <a:extLst>
+            <a:ext uri="{FF2B5EF4-FFF2-40B4-BE49-F238E27FC236}">
+              <a16:creationId xmlns:a16="http://schemas.microsoft.com/office/drawing/2014/main" id="{E384B972-CBCD-AE5F-75A6-1F543DD5FA12}"/>
+            </a:ext>
+          </a:extLst>
+        </p:cNvPr>
+        <p:cNvGrpSpPr/>
+        <p:nvPr/>
+      </p:nvGrpSpPr>
+      <p:grpSpPr>
+        <a:xfrm>
+          <a:off x="0" y="0"/>
+          <a:ext cx="0" cy="0"/>
+          <a:chOff x="0" y="0"/>
+          <a:chExt cx="0" cy="0"/>
+        </a:xfrm>
+      </p:grpSpPr>
+      <p:sp>
+        <p:nvSpPr>
+          <p:cNvPr id="2" name="幻灯片图像占位符 1">
+            <a:extLst>
+              <a:ext uri="{FF2B5EF4-FFF2-40B4-BE49-F238E27FC236}">
+                <a16:creationId xmlns:a16="http://schemas.microsoft.com/office/drawing/2014/main" id="{10085DA1-C479-5D32-C6F9-4D5C130A58F3}"/>
+              </a:ext>
+            </a:extLst>
+          </p:cNvPr>
+          <p:cNvSpPr>
+            <a:spLocks noGrp="1" noRot="1" noChangeAspect="1"/>
+          </p:cNvSpPr>
+          <p:nvPr>
+            <p:ph type="sldImg"/>
+          </p:nvPr>
+        </p:nvSpPr>
+        <p:spPr/>
+      </p:sp>
+      <p:sp>
+        <p:nvSpPr>
+          <p:cNvPr id="3" name="文本占位符 2">
+            <a:extLst>
+              <a:ext uri="{FF2B5EF4-FFF2-40B4-BE49-F238E27FC236}">
+                <a16:creationId xmlns:a16="http://schemas.microsoft.com/office/drawing/2014/main" id="{D961784D-EC65-6AD1-AD39-7372576409EF}"/>
+              </a:ext>
+            </a:extLst>
+          </p:cNvPr>
+          <p:cNvSpPr>
+            <a:spLocks noGrp="1"/>
+          </p:cNvSpPr>
+          <p:nvPr>
+            <p:ph type="body" idx="1"/>
+          </p:nvPr>
+        </p:nvSpPr>
+        <p:spPr/>
+        <p:txBody>
+          <a:bodyPr/>
+          <a:lstStyle/>
+          <a:p>
+            <a:r>
+              <a:rPr lang="zh-CN" altLang="en-US"/>
+              <a:t>施工线路长，声屏障高度高，结构型式多，工程体量大，占道施工。</a:t>
+            </a:r>
+          </a:p>
+          <a:p>
+            <a:endParaRPr lang="zh-CN" altLang="en-US"/>
+          </a:p>
+          <a:p>
+            <a:endParaRPr lang="zh-CN" altLang="en-US"/>
+          </a:p>
+          <a:p>
+            <a:endParaRPr lang="zh-CN" altLang="en-US"/>
+          </a:p>
+          <a:p>
+            <a:endParaRPr lang="zh-CN" altLang="en-US"/>
+          </a:p>
+        </p:txBody>
+      </p:sp>
+    </p:spTree>
+    <p:extLst>
+      <p:ext uri="{BB962C8B-B14F-4D97-AF65-F5344CB8AC3E}">
+        <p14:creationId xmlns:p14="http://schemas.microsoft.com/office/powerpoint/2010/main" val="4127835504"/>
+      </p:ext>
+    </p:extLst>
+  </p:cSld>
+  <p:clrMapOvr>
+    <a:masterClrMapping/>
+  </p:clrMapOvr>
+</p:notes>
+</file>
+
+<file path=ppt/notesSlides/notesSlide4.xml><?xml version="1.0" encoding="utf-8"?>
+<p:notes xmlns:a="http://schemas.openxmlformats.org/drawingml/2006/main" xmlns:r="http://schemas.openxmlformats.org/officeDocument/2006/relationships" xmlns:p="http://schemas.openxmlformats.org/presentationml/2006/main">
+  <p:cSld>
+    <p:spTree>
+      <p:nvGrpSpPr>
+        <p:cNvPr id="1" name="">
+          <a:extLst>
+            <a:ext uri="{FF2B5EF4-FFF2-40B4-BE49-F238E27FC236}">
+              <a16:creationId xmlns:a16="http://schemas.microsoft.com/office/drawing/2014/main" id="{DCC68BA9-7BBD-2AAF-5EE0-CA33F5EA0B9E}"/>
+            </a:ext>
+          </a:extLst>
+        </p:cNvPr>
+        <p:cNvGrpSpPr/>
+        <p:nvPr/>
+      </p:nvGrpSpPr>
+      <p:grpSpPr>
+        <a:xfrm>
+          <a:off x="0" y="0"/>
+          <a:ext cx="0" cy="0"/>
+          <a:chOff x="0" y="0"/>
+          <a:chExt cx="0" cy="0"/>
+        </a:xfrm>
+      </p:grpSpPr>
+      <p:sp>
+        <p:nvSpPr>
+          <p:cNvPr id="2" name="幻灯片图像占位符 1">
+            <a:extLst>
+              <a:ext uri="{FF2B5EF4-FFF2-40B4-BE49-F238E27FC236}">
+                <a16:creationId xmlns:a16="http://schemas.microsoft.com/office/drawing/2014/main" id="{4406E66B-349F-9E87-5BD2-2B259ACBB95D}"/>
+              </a:ext>
+            </a:extLst>
+          </p:cNvPr>
+          <p:cNvSpPr>
+            <a:spLocks noGrp="1" noRot="1" noChangeAspect="1"/>
+          </p:cNvSpPr>
+          <p:nvPr>
+            <p:ph type="sldImg"/>
+          </p:nvPr>
+        </p:nvSpPr>
+        <p:spPr/>
+      </p:sp>
+      <p:sp>
+        <p:nvSpPr>
+          <p:cNvPr id="3" name="文本占位符 2">
+            <a:extLst>
+              <a:ext uri="{FF2B5EF4-FFF2-40B4-BE49-F238E27FC236}">
+                <a16:creationId xmlns:a16="http://schemas.microsoft.com/office/drawing/2014/main" id="{C2354EF9-D42B-93B5-4285-8DF444EB8C1D}"/>
+              </a:ext>
+            </a:extLst>
+          </p:cNvPr>
+          <p:cNvSpPr>
+            <a:spLocks noGrp="1"/>
+          </p:cNvSpPr>
+          <p:nvPr>
+            <p:ph type="body" idx="1"/>
+          </p:nvPr>
+        </p:nvSpPr>
+        <p:spPr/>
+        <p:txBody>
+          <a:bodyPr/>
+          <a:lstStyle/>
+          <a:p>
+            <a:r>
+              <a:rPr lang="zh-CN" altLang="en-US"/>
+              <a:t>施工线路长，声屏障高度高，结构型式多，工程体量大，占道施工。</a:t>
+            </a:r>
+          </a:p>
+          <a:p>
+            <a:endParaRPr lang="zh-CN" altLang="en-US"/>
+          </a:p>
+          <a:p>
+            <a:endParaRPr lang="zh-CN" altLang="en-US"/>
+          </a:p>
+          <a:p>
+            <a:endParaRPr lang="zh-CN" altLang="en-US"/>
+          </a:p>
+          <a:p>
+            <a:endParaRPr lang="zh-CN" altLang="en-US"/>
+          </a:p>
+        </p:txBody>
+      </p:sp>
+    </p:spTree>
+    <p:extLst>
+      <p:ext uri="{BB962C8B-B14F-4D97-AF65-F5344CB8AC3E}">
+        <p14:creationId xmlns:p14="http://schemas.microsoft.com/office/powerpoint/2010/main" val="3953349165"/>
+      </p:ext>
+    </p:extLst>
+  </p:cSld>
+  <p:clrMapOvr>
+    <a:masterClrMapping/>
+  </p:clrMapOvr>
+</p:notes>
+</file>
+
+<file path=ppt/notesSlides/notesSlide5.xml><?xml version="1.0" encoding="utf-8"?>
+<p:notes xmlns:a="http://schemas.openxmlformats.org/drawingml/2006/main" xmlns:r="http://schemas.openxmlformats.org/officeDocument/2006/relationships" xmlns:p="http://schemas.openxmlformats.org/presentationml/2006/main">
+  <p:cSld>
+    <p:spTree>
+      <p:nvGrpSpPr>
+        <p:cNvPr id="1" name="">
+          <a:extLst>
+            <a:ext uri="{FF2B5EF4-FFF2-40B4-BE49-F238E27FC236}">
+              <a16:creationId xmlns:a16="http://schemas.microsoft.com/office/drawing/2014/main" id="{0429FFE0-0670-2BDA-B9FF-E2896987C6A0}"/>
+            </a:ext>
+          </a:extLst>
+        </p:cNvPr>
+        <p:cNvGrpSpPr/>
+        <p:nvPr/>
+      </p:nvGrpSpPr>
+      <p:grpSpPr>
+        <a:xfrm>
+          <a:off x="0" y="0"/>
+          <a:ext cx="0" cy="0"/>
+          <a:chOff x="0" y="0"/>
+          <a:chExt cx="0" cy="0"/>
+        </a:xfrm>
+      </p:grpSpPr>
+      <p:sp>
+        <p:nvSpPr>
+          <p:cNvPr id="2" name="幻灯片图像占位符 1">
+            <a:extLst>
+              <a:ext uri="{FF2B5EF4-FFF2-40B4-BE49-F238E27FC236}">
+                <a16:creationId xmlns:a16="http://schemas.microsoft.com/office/drawing/2014/main" id="{C6C17483-FBBE-FD3D-79AA-3BEB9CB5E3F0}"/>
+              </a:ext>
+            </a:extLst>
+          </p:cNvPr>
+          <p:cNvSpPr>
+            <a:spLocks noGrp="1" noRot="1" noChangeAspect="1"/>
+          </p:cNvSpPr>
+          <p:nvPr>
+            <p:ph type="sldImg"/>
+          </p:nvPr>
+        </p:nvSpPr>
+        <p:spPr/>
+      </p:sp>
+      <p:sp>
+        <p:nvSpPr>
+          <p:cNvPr id="3" name="文本占位符 2">
+            <a:extLst>
+              <a:ext uri="{FF2B5EF4-FFF2-40B4-BE49-F238E27FC236}">
+                <a16:creationId xmlns:a16="http://schemas.microsoft.com/office/drawing/2014/main" id="{233C4F89-2D46-4EC8-9ED6-5EFA407D125B}"/>
+              </a:ext>
+            </a:extLst>
+          </p:cNvPr>
+          <p:cNvSpPr>
+            <a:spLocks noGrp="1"/>
+          </p:cNvSpPr>
+          <p:nvPr>
+            <p:ph type="body" idx="1"/>
+          </p:nvPr>
+        </p:nvSpPr>
+        <p:spPr/>
+        <p:txBody>
+          <a:bodyPr/>
+          <a:lstStyle/>
+          <a:p>
+            <a:r>
+              <a:rPr lang="zh-CN" altLang="en-US"/>
+              <a:t>施工线路长，声屏障高度高，结构型式多，工程体量大，占道施工。</a:t>
+            </a:r>
+          </a:p>
+          <a:p>
+            <a:endParaRPr lang="zh-CN" altLang="en-US"/>
+          </a:p>
+          <a:p>
+            <a:endParaRPr lang="zh-CN" altLang="en-US"/>
+          </a:p>
+          <a:p>
+            <a:endParaRPr lang="zh-CN" altLang="en-US"/>
+          </a:p>
+          <a:p>
+            <a:endParaRPr lang="zh-CN" altLang="en-US"/>
+          </a:p>
+        </p:txBody>
+      </p:sp>
+    </p:spTree>
+    <p:extLst>
+      <p:ext uri="{BB962C8B-B14F-4D97-AF65-F5344CB8AC3E}">
+        <p14:creationId xmlns:p14="http://schemas.microsoft.com/office/powerpoint/2010/main" val="2128397711"/>
+      </p:ext>
+    </p:extLst>
+  </p:cSld>
+  <p:clrMapOvr>
+    <a:masterClrMapping/>
+  </p:clrMapOvr>
+</p:notes>
+</file>
+
+<file path=ppt/notesSlides/notesSlide6.xml><?xml version="1.0" encoding="utf-8"?>
+<p:notes xmlns:a="http://schemas.openxmlformats.org/drawingml/2006/main" xmlns:r="http://schemas.openxmlformats.org/officeDocument/2006/relationships" xmlns:p="http://schemas.openxmlformats.org/presentationml/2006/main">
+  <p:cSld>
+    <p:spTree>
+      <p:nvGrpSpPr>
+        <p:cNvPr id="1" name="">
+          <a:extLst>
+            <a:ext uri="{FF2B5EF4-FFF2-40B4-BE49-F238E27FC236}">
+              <a16:creationId xmlns:a16="http://schemas.microsoft.com/office/drawing/2014/main" id="{3215446C-1D99-4CE5-0098-E1AAFAB46E0F}"/>
+            </a:ext>
+          </a:extLst>
+        </p:cNvPr>
+        <p:cNvGrpSpPr/>
+        <p:nvPr/>
+      </p:nvGrpSpPr>
+      <p:grpSpPr>
+        <a:xfrm>
+          <a:off x="0" y="0"/>
+          <a:ext cx="0" cy="0"/>
+          <a:chOff x="0" y="0"/>
+          <a:chExt cx="0" cy="0"/>
+        </a:xfrm>
+      </p:grpSpPr>
+      <p:sp>
+        <p:nvSpPr>
+          <p:cNvPr id="2" name="幻灯片图像占位符 1">
+            <a:extLst>
+              <a:ext uri="{FF2B5EF4-FFF2-40B4-BE49-F238E27FC236}">
+                <a16:creationId xmlns:a16="http://schemas.microsoft.com/office/drawing/2014/main" id="{870DE51B-A49D-35B2-DFFD-E88A239F4EE2}"/>
+              </a:ext>
+            </a:extLst>
+          </p:cNvPr>
+          <p:cNvSpPr>
+            <a:spLocks noGrp="1" noRot="1" noChangeAspect="1"/>
+          </p:cNvSpPr>
+          <p:nvPr>
+            <p:ph type="sldImg"/>
+          </p:nvPr>
+        </p:nvSpPr>
+        <p:spPr/>
+      </p:sp>
+      <p:sp>
+        <p:nvSpPr>
+          <p:cNvPr id="3" name="文本占位符 2">
+            <a:extLst>
+              <a:ext uri="{FF2B5EF4-FFF2-40B4-BE49-F238E27FC236}">
+                <a16:creationId xmlns:a16="http://schemas.microsoft.com/office/drawing/2014/main" id="{82E46648-C6BB-757C-2114-085C41EB339D}"/>
+              </a:ext>
+            </a:extLst>
+          </p:cNvPr>
+          <p:cNvSpPr>
+            <a:spLocks noGrp="1"/>
+          </p:cNvSpPr>
+          <p:nvPr>
+            <p:ph type="body" idx="1"/>
+          </p:nvPr>
+        </p:nvSpPr>
+        <p:spPr/>
+        <p:txBody>
+          <a:bodyPr/>
+          <a:lstStyle/>
+          <a:p>
+            <a:r>
+              <a:rPr lang="zh-CN" altLang="en-US"/>
+              <a:t>施工线路长，声屏障高度高，结构型式多，工程体量大，占道施工。</a:t>
+            </a:r>
+          </a:p>
+          <a:p>
+            <a:endParaRPr lang="zh-CN" altLang="en-US"/>
+          </a:p>
+          <a:p>
+            <a:endParaRPr lang="zh-CN" altLang="en-US"/>
+          </a:p>
+          <a:p>
+            <a:endParaRPr lang="zh-CN" altLang="en-US"/>
+          </a:p>
+          <a:p>
+            <a:endParaRPr lang="zh-CN" altLang="en-US"/>
+          </a:p>
+        </p:txBody>
+      </p:sp>
+    </p:spTree>
+    <p:extLst>
+      <p:ext uri="{BB962C8B-B14F-4D97-AF65-F5344CB8AC3E}">
+        <p14:creationId xmlns:p14="http://schemas.microsoft.com/office/powerpoint/2010/main" val="2961274737"/>
+      </p:ext>
+    </p:extLst>
+  </p:cSld>
+  <p:clrMapOvr>
+    <a:masterClrMapping/>
+  </p:clrMapOvr>
+</p:notes>
+</file>
+
+<file path=ppt/notesSlides/notesSlide7.xml><?xml version="1.0" encoding="utf-8"?>
+<p:notes xmlns:a="http://schemas.openxmlformats.org/drawingml/2006/main" xmlns:r="http://schemas.openxmlformats.org/officeDocument/2006/relationships" xmlns:p="http://schemas.openxmlformats.org/presentationml/2006/main">
+  <p:cSld>
+    <p:spTree>
+      <p:nvGrpSpPr>
+        <p:cNvPr id="1" name="">
+          <a:extLst>
+            <a:ext uri="{FF2B5EF4-FFF2-40B4-BE49-F238E27FC236}">
+              <a16:creationId xmlns:a16="http://schemas.microsoft.com/office/drawing/2014/main" id="{4209509F-0901-0E91-9173-53F9FCF70195}"/>
+            </a:ext>
+          </a:extLst>
+        </p:cNvPr>
+        <p:cNvGrpSpPr/>
+        <p:nvPr/>
+      </p:nvGrpSpPr>
+      <p:grpSpPr>
+        <a:xfrm>
+          <a:off x="0" y="0"/>
+          <a:ext cx="0" cy="0"/>
+          <a:chOff x="0" y="0"/>
+          <a:chExt cx="0" cy="0"/>
+        </a:xfrm>
+      </p:grpSpPr>
+      <p:sp>
+        <p:nvSpPr>
+          <p:cNvPr id="2" name="幻灯片图像占位符 1">
+            <a:extLst>
+              <a:ext uri="{FF2B5EF4-FFF2-40B4-BE49-F238E27FC236}">
+                <a16:creationId xmlns:a16="http://schemas.microsoft.com/office/drawing/2014/main" id="{083864E6-F8B4-FA0E-5605-7684937B325B}"/>
+              </a:ext>
+            </a:extLst>
+          </p:cNvPr>
+          <p:cNvSpPr>
+            <a:spLocks noGrp="1" noRot="1" noChangeAspect="1"/>
+          </p:cNvSpPr>
+          <p:nvPr>
+            <p:ph type="sldImg"/>
+          </p:nvPr>
+        </p:nvSpPr>
+        <p:spPr/>
+      </p:sp>
+      <p:sp>
+        <p:nvSpPr>
+          <p:cNvPr id="3" name="文本占位符 2">
+            <a:extLst>
+              <a:ext uri="{FF2B5EF4-FFF2-40B4-BE49-F238E27FC236}">
+                <a16:creationId xmlns:a16="http://schemas.microsoft.com/office/drawing/2014/main" id="{515A81C1-47AD-AC18-1132-2D27EE8F3F44}"/>
+              </a:ext>
+            </a:extLst>
+          </p:cNvPr>
+          <p:cNvSpPr>
+            <a:spLocks noGrp="1"/>
+          </p:cNvSpPr>
+          <p:nvPr>
+            <p:ph type="body" idx="1"/>
+          </p:nvPr>
+        </p:nvSpPr>
+        <p:spPr/>
+        <p:txBody>
+          <a:bodyPr/>
+          <a:lstStyle/>
+          <a:p>
+            <a:r>
+              <a:rPr lang="zh-CN" altLang="en-US"/>
+              <a:t>施工线路长，声屏障高度高，结构型式多，工程体量大，占道施工。</a:t>
+            </a:r>
+          </a:p>
+          <a:p>
+            <a:endParaRPr lang="zh-CN" altLang="en-US"/>
+          </a:p>
+          <a:p>
+            <a:endParaRPr lang="zh-CN" altLang="en-US"/>
+          </a:p>
+          <a:p>
+            <a:endParaRPr lang="zh-CN" altLang="en-US"/>
+          </a:p>
+          <a:p>
+            <a:endParaRPr lang="zh-CN" altLang="en-US"/>
+          </a:p>
+        </p:txBody>
+      </p:sp>
+    </p:spTree>
+    <p:extLst>
+      <p:ext uri="{BB962C8B-B14F-4D97-AF65-F5344CB8AC3E}">
+        <p14:creationId xmlns:p14="http://schemas.microsoft.com/office/powerpoint/2010/main" val="4168981323"/>
+      </p:ext>
+    </p:extLst>
+  </p:cSld>
+  <p:clrMapOvr>
+    <a:masterClrMapping/>
+  </p:clrMapOvr>
+</p:notes>
+</file>
+
+<file path=ppt/notesSlides/notesSlide8.xml><?xml version="1.0" encoding="utf-8"?>
+<p:notes xmlns:a="http://schemas.openxmlformats.org/drawingml/2006/main" xmlns:r="http://schemas.openxmlformats.org/officeDocument/2006/relationships" xmlns:p="http://schemas.openxmlformats.org/presentationml/2006/main">
+  <p:cSld>
+    <p:spTree>
+      <p:nvGrpSpPr>
+        <p:cNvPr id="1" name="">
+          <a:extLst>
+            <a:ext uri="{FF2B5EF4-FFF2-40B4-BE49-F238E27FC236}">
+              <a16:creationId xmlns:a16="http://schemas.microsoft.com/office/drawing/2014/main" id="{B3ACB3EA-1F29-E484-4610-F04A0DB127AE}"/>
+            </a:ext>
+          </a:extLst>
+        </p:cNvPr>
+        <p:cNvGrpSpPr/>
+        <p:nvPr/>
+      </p:nvGrpSpPr>
+      <p:grpSpPr>
+        <a:xfrm>
+          <a:off x="0" y="0"/>
+          <a:ext cx="0" cy="0"/>
+          <a:chOff x="0" y="0"/>
+          <a:chExt cx="0" cy="0"/>
+        </a:xfrm>
+      </p:grpSpPr>
+      <p:sp>
+        <p:nvSpPr>
+          <p:cNvPr id="2" name="幻灯片图像占位符 1">
+            <a:extLst>
+              <a:ext uri="{FF2B5EF4-FFF2-40B4-BE49-F238E27FC236}">
+                <a16:creationId xmlns:a16="http://schemas.microsoft.com/office/drawing/2014/main" id="{B8A704A6-A98D-E39A-B2AC-CD0E4A79C22B}"/>
+              </a:ext>
+            </a:extLst>
+          </p:cNvPr>
+          <p:cNvSpPr>
+            <a:spLocks noGrp="1" noRot="1" noChangeAspect="1"/>
+          </p:cNvSpPr>
+          <p:nvPr>
+            <p:ph type="sldImg"/>
+          </p:nvPr>
+        </p:nvSpPr>
+        <p:spPr/>
+      </p:sp>
+      <p:sp>
+        <p:nvSpPr>
+          <p:cNvPr id="3" name="文本占位符 2">
+            <a:extLst>
+              <a:ext uri="{FF2B5EF4-FFF2-40B4-BE49-F238E27FC236}">
+                <a16:creationId xmlns:a16="http://schemas.microsoft.com/office/drawing/2014/main" id="{D8EEDD07-B116-4DE9-0EA9-432FCAA962F1}"/>
+              </a:ext>
+            </a:extLst>
+          </p:cNvPr>
+          <p:cNvSpPr>
+            <a:spLocks noGrp="1"/>
+          </p:cNvSpPr>
+          <p:nvPr>
+            <p:ph type="body" idx="1"/>
+          </p:nvPr>
+        </p:nvSpPr>
+        <p:spPr/>
+        <p:txBody>
+          <a:bodyPr/>
+          <a:lstStyle/>
+          <a:p>
+            <a:r>
+              <a:rPr lang="zh-CN" altLang="en-US"/>
+              <a:t>施工线路长，声屏障高度高，结构型式多，工程体量大，占道施工。</a:t>
+            </a:r>
+          </a:p>
+          <a:p>
+            <a:endParaRPr lang="zh-CN" altLang="en-US"/>
+          </a:p>
+          <a:p>
+            <a:endParaRPr lang="zh-CN" altLang="en-US"/>
+          </a:p>
+          <a:p>
+            <a:endParaRPr lang="zh-CN" altLang="en-US"/>
+          </a:p>
+          <a:p>
+            <a:endParaRPr lang="zh-CN" altLang="en-US"/>
+          </a:p>
+        </p:txBody>
+      </p:sp>
+    </p:spTree>
+    <p:extLst>
+      <p:ext uri="{BB962C8B-B14F-4D97-AF65-F5344CB8AC3E}">
+        <p14:creationId xmlns:p14="http://schemas.microsoft.com/office/powerpoint/2010/main" val="3137130065"/>
+      </p:ext>
+    </p:extLst>
+  </p:cSld>
+  <p:clrMapOvr>
+    <a:masterClrMapping/>
+  </p:clrMapOvr>
+</p:notes>
+</file>
+
+<file path=ppt/notesSlides/notesSlide9.xml><?xml version="1.0" encoding="utf-8"?>
 <p:notes xmlns:a="http://schemas.openxmlformats.org/drawingml/2006/main" xmlns:r="http://schemas.openxmlformats.org/officeDocument/2006/relationships" xmlns:p="http://schemas.openxmlformats.org/presentationml/2006/main">
   <p:cSld>
     <p:spTree>
@@ -980,735 +1635,6 @@
     <p:extLst>
       <p:ext uri="{BB962C8B-B14F-4D97-AF65-F5344CB8AC3E}">
         <p14:creationId xmlns:p14="http://schemas.microsoft.com/office/powerpoint/2010/main" val="826137108"/>
-      </p:ext>
-    </p:extLst>
-  </p:cSld>
-  <p:clrMapOvr>
-    <a:masterClrMapping/>
-  </p:clrMapOvr>
-</p:notes>
-</file>
-
-<file path=ppt/notesSlides/notesSlide2.xml><?xml version="1.0" encoding="utf-8"?>
-<p:notes xmlns:a="http://schemas.openxmlformats.org/drawingml/2006/main" xmlns:r="http://schemas.openxmlformats.org/officeDocument/2006/relationships" xmlns:p="http://schemas.openxmlformats.org/presentationml/2006/main">
-  <p:cSld>
-    <p:spTree>
-      <p:nvGrpSpPr>
-        <p:cNvPr id="1" name=""/>
-        <p:cNvGrpSpPr/>
-        <p:nvPr/>
-      </p:nvGrpSpPr>
-      <p:grpSpPr>
-        <a:xfrm>
-          <a:off x="0" y="0"/>
-          <a:ext cx="0" cy="0"/>
-          <a:chOff x="0" y="0"/>
-          <a:chExt cx="0" cy="0"/>
-        </a:xfrm>
-      </p:grpSpPr>
-      <p:sp>
-        <p:nvSpPr>
-          <p:cNvPr id="2" name="幻灯片图像占位符 1"/>
-          <p:cNvSpPr>
-            <a:spLocks noGrp="1" noRot="1" noChangeAspect="1"/>
-          </p:cNvSpPr>
-          <p:nvPr>
-            <p:ph type="sldImg"/>
-          </p:nvPr>
-        </p:nvSpPr>
-        <p:spPr/>
-      </p:sp>
-      <p:sp>
-        <p:nvSpPr>
-          <p:cNvPr id="3" name="文本占位符 2"/>
-          <p:cNvSpPr>
-            <a:spLocks noGrp="1"/>
-          </p:cNvSpPr>
-          <p:nvPr>
-            <p:ph type="body" idx="1"/>
-          </p:nvPr>
-        </p:nvSpPr>
-        <p:spPr/>
-        <p:txBody>
-          <a:bodyPr/>
-          <a:lstStyle/>
-          <a:p>
-            <a:r>
-              <a:rPr lang="zh-CN" altLang="en-US"/>
-              <a:t>施工线路长，声屏障高度高，结构型式多，工程体量大，占道施工。</a:t>
-            </a:r>
-          </a:p>
-          <a:p>
-            <a:endParaRPr lang="zh-CN" altLang="en-US"/>
-          </a:p>
-          <a:p>
-            <a:endParaRPr lang="zh-CN" altLang="en-US"/>
-          </a:p>
-          <a:p>
-            <a:endParaRPr lang="zh-CN" altLang="en-US"/>
-          </a:p>
-          <a:p>
-            <a:endParaRPr lang="zh-CN" altLang="en-US"/>
-          </a:p>
-        </p:txBody>
-      </p:sp>
-    </p:spTree>
-  </p:cSld>
-  <p:clrMapOvr>
-    <a:masterClrMapping/>
-  </p:clrMapOvr>
-</p:notes>
-</file>
-
-<file path=ppt/notesSlides/notesSlide3.xml><?xml version="1.0" encoding="utf-8"?>
-<p:notes xmlns:a="http://schemas.openxmlformats.org/drawingml/2006/main" xmlns:r="http://schemas.openxmlformats.org/officeDocument/2006/relationships" xmlns:p="http://schemas.openxmlformats.org/presentationml/2006/main">
-  <p:cSld>
-    <p:spTree>
-      <p:nvGrpSpPr>
-        <p:cNvPr id="1" name="">
-          <a:extLst>
-            <a:ext uri="{FF2B5EF4-FFF2-40B4-BE49-F238E27FC236}">
-              <a16:creationId xmlns:a16="http://schemas.microsoft.com/office/drawing/2014/main" id="{A16C4CC4-C66A-6053-03D1-9429C9351E30}"/>
-            </a:ext>
-          </a:extLst>
-        </p:cNvPr>
-        <p:cNvGrpSpPr/>
-        <p:nvPr/>
-      </p:nvGrpSpPr>
-      <p:grpSpPr>
-        <a:xfrm>
-          <a:off x="0" y="0"/>
-          <a:ext cx="0" cy="0"/>
-          <a:chOff x="0" y="0"/>
-          <a:chExt cx="0" cy="0"/>
-        </a:xfrm>
-      </p:grpSpPr>
-      <p:sp>
-        <p:nvSpPr>
-          <p:cNvPr id="2" name="幻灯片图像占位符 1">
-            <a:extLst>
-              <a:ext uri="{FF2B5EF4-FFF2-40B4-BE49-F238E27FC236}">
-                <a16:creationId xmlns:a16="http://schemas.microsoft.com/office/drawing/2014/main" id="{22AE7059-F8F9-A7DE-128B-83B5FD873970}"/>
-              </a:ext>
-            </a:extLst>
-          </p:cNvPr>
-          <p:cNvSpPr>
-            <a:spLocks noGrp="1" noRot="1" noChangeAspect="1"/>
-          </p:cNvSpPr>
-          <p:nvPr>
-            <p:ph type="sldImg"/>
-          </p:nvPr>
-        </p:nvSpPr>
-        <p:spPr/>
-      </p:sp>
-      <p:sp>
-        <p:nvSpPr>
-          <p:cNvPr id="3" name="文本占位符 2">
-            <a:extLst>
-              <a:ext uri="{FF2B5EF4-FFF2-40B4-BE49-F238E27FC236}">
-                <a16:creationId xmlns:a16="http://schemas.microsoft.com/office/drawing/2014/main" id="{FD18A9CE-6068-9154-715B-C8AA934F55F8}"/>
-              </a:ext>
-            </a:extLst>
-          </p:cNvPr>
-          <p:cNvSpPr>
-            <a:spLocks noGrp="1"/>
-          </p:cNvSpPr>
-          <p:nvPr>
-            <p:ph type="body" idx="1"/>
-          </p:nvPr>
-        </p:nvSpPr>
-        <p:spPr/>
-        <p:txBody>
-          <a:bodyPr/>
-          <a:lstStyle/>
-          <a:p>
-            <a:r>
-              <a:rPr lang="zh-CN" altLang="en-US"/>
-              <a:t>施工线路长，声屏障高度高，结构型式多，工程体量大，占道施工。</a:t>
-            </a:r>
-          </a:p>
-          <a:p>
-            <a:endParaRPr lang="zh-CN" altLang="en-US"/>
-          </a:p>
-          <a:p>
-            <a:endParaRPr lang="zh-CN" altLang="en-US"/>
-          </a:p>
-          <a:p>
-            <a:endParaRPr lang="zh-CN" altLang="en-US"/>
-          </a:p>
-          <a:p>
-            <a:endParaRPr lang="zh-CN" altLang="en-US"/>
-          </a:p>
-        </p:txBody>
-      </p:sp>
-    </p:spTree>
-    <p:extLst>
-      <p:ext uri="{BB962C8B-B14F-4D97-AF65-F5344CB8AC3E}">
-        <p14:creationId xmlns:p14="http://schemas.microsoft.com/office/powerpoint/2010/main" val="115977314"/>
-      </p:ext>
-    </p:extLst>
-  </p:cSld>
-  <p:clrMapOvr>
-    <a:masterClrMapping/>
-  </p:clrMapOvr>
-</p:notes>
-</file>
-
-<file path=ppt/notesSlides/notesSlide4.xml><?xml version="1.0" encoding="utf-8"?>
-<p:notes xmlns:a="http://schemas.openxmlformats.org/drawingml/2006/main" xmlns:r="http://schemas.openxmlformats.org/officeDocument/2006/relationships" xmlns:p="http://schemas.openxmlformats.org/presentationml/2006/main">
-  <p:cSld>
-    <p:spTree>
-      <p:nvGrpSpPr>
-        <p:cNvPr id="1" name="">
-          <a:extLst>
-            <a:ext uri="{FF2B5EF4-FFF2-40B4-BE49-F238E27FC236}">
-              <a16:creationId xmlns:a16="http://schemas.microsoft.com/office/drawing/2014/main" id="{E384B972-CBCD-AE5F-75A6-1F543DD5FA12}"/>
-            </a:ext>
-          </a:extLst>
-        </p:cNvPr>
-        <p:cNvGrpSpPr/>
-        <p:nvPr/>
-      </p:nvGrpSpPr>
-      <p:grpSpPr>
-        <a:xfrm>
-          <a:off x="0" y="0"/>
-          <a:ext cx="0" cy="0"/>
-          <a:chOff x="0" y="0"/>
-          <a:chExt cx="0" cy="0"/>
-        </a:xfrm>
-      </p:grpSpPr>
-      <p:sp>
-        <p:nvSpPr>
-          <p:cNvPr id="2" name="幻灯片图像占位符 1">
-            <a:extLst>
-              <a:ext uri="{FF2B5EF4-FFF2-40B4-BE49-F238E27FC236}">
-                <a16:creationId xmlns:a16="http://schemas.microsoft.com/office/drawing/2014/main" id="{10085DA1-C479-5D32-C6F9-4D5C130A58F3}"/>
-              </a:ext>
-            </a:extLst>
-          </p:cNvPr>
-          <p:cNvSpPr>
-            <a:spLocks noGrp="1" noRot="1" noChangeAspect="1"/>
-          </p:cNvSpPr>
-          <p:nvPr>
-            <p:ph type="sldImg"/>
-          </p:nvPr>
-        </p:nvSpPr>
-        <p:spPr/>
-      </p:sp>
-      <p:sp>
-        <p:nvSpPr>
-          <p:cNvPr id="3" name="文本占位符 2">
-            <a:extLst>
-              <a:ext uri="{FF2B5EF4-FFF2-40B4-BE49-F238E27FC236}">
-                <a16:creationId xmlns:a16="http://schemas.microsoft.com/office/drawing/2014/main" id="{D961784D-EC65-6AD1-AD39-7372576409EF}"/>
-              </a:ext>
-            </a:extLst>
-          </p:cNvPr>
-          <p:cNvSpPr>
-            <a:spLocks noGrp="1"/>
-          </p:cNvSpPr>
-          <p:nvPr>
-            <p:ph type="body" idx="1"/>
-          </p:nvPr>
-        </p:nvSpPr>
-        <p:spPr/>
-        <p:txBody>
-          <a:bodyPr/>
-          <a:lstStyle/>
-          <a:p>
-            <a:r>
-              <a:rPr lang="zh-CN" altLang="en-US"/>
-              <a:t>施工线路长，声屏障高度高，结构型式多，工程体量大，占道施工。</a:t>
-            </a:r>
-          </a:p>
-          <a:p>
-            <a:endParaRPr lang="zh-CN" altLang="en-US"/>
-          </a:p>
-          <a:p>
-            <a:endParaRPr lang="zh-CN" altLang="en-US"/>
-          </a:p>
-          <a:p>
-            <a:endParaRPr lang="zh-CN" altLang="en-US"/>
-          </a:p>
-          <a:p>
-            <a:endParaRPr lang="zh-CN" altLang="en-US"/>
-          </a:p>
-        </p:txBody>
-      </p:sp>
-    </p:spTree>
-    <p:extLst>
-      <p:ext uri="{BB962C8B-B14F-4D97-AF65-F5344CB8AC3E}">
-        <p14:creationId xmlns:p14="http://schemas.microsoft.com/office/powerpoint/2010/main" val="4127835504"/>
-      </p:ext>
-    </p:extLst>
-  </p:cSld>
-  <p:clrMapOvr>
-    <a:masterClrMapping/>
-  </p:clrMapOvr>
-</p:notes>
-</file>
-
-<file path=ppt/notesSlides/notesSlide5.xml><?xml version="1.0" encoding="utf-8"?>
-<p:notes xmlns:a="http://schemas.openxmlformats.org/drawingml/2006/main" xmlns:r="http://schemas.openxmlformats.org/officeDocument/2006/relationships" xmlns:p="http://schemas.openxmlformats.org/presentationml/2006/main">
-  <p:cSld>
-    <p:spTree>
-      <p:nvGrpSpPr>
-        <p:cNvPr id="1" name="">
-          <a:extLst>
-            <a:ext uri="{FF2B5EF4-FFF2-40B4-BE49-F238E27FC236}">
-              <a16:creationId xmlns:a16="http://schemas.microsoft.com/office/drawing/2014/main" id="{DCC68BA9-7BBD-2AAF-5EE0-CA33F5EA0B9E}"/>
-            </a:ext>
-          </a:extLst>
-        </p:cNvPr>
-        <p:cNvGrpSpPr/>
-        <p:nvPr/>
-      </p:nvGrpSpPr>
-      <p:grpSpPr>
-        <a:xfrm>
-          <a:off x="0" y="0"/>
-          <a:ext cx="0" cy="0"/>
-          <a:chOff x="0" y="0"/>
-          <a:chExt cx="0" cy="0"/>
-        </a:xfrm>
-      </p:grpSpPr>
-      <p:sp>
-        <p:nvSpPr>
-          <p:cNvPr id="2" name="幻灯片图像占位符 1">
-            <a:extLst>
-              <a:ext uri="{FF2B5EF4-FFF2-40B4-BE49-F238E27FC236}">
-                <a16:creationId xmlns:a16="http://schemas.microsoft.com/office/drawing/2014/main" id="{4406E66B-349F-9E87-5BD2-2B259ACBB95D}"/>
-              </a:ext>
-            </a:extLst>
-          </p:cNvPr>
-          <p:cNvSpPr>
-            <a:spLocks noGrp="1" noRot="1" noChangeAspect="1"/>
-          </p:cNvSpPr>
-          <p:nvPr>
-            <p:ph type="sldImg"/>
-          </p:nvPr>
-        </p:nvSpPr>
-        <p:spPr/>
-      </p:sp>
-      <p:sp>
-        <p:nvSpPr>
-          <p:cNvPr id="3" name="文本占位符 2">
-            <a:extLst>
-              <a:ext uri="{FF2B5EF4-FFF2-40B4-BE49-F238E27FC236}">
-                <a16:creationId xmlns:a16="http://schemas.microsoft.com/office/drawing/2014/main" id="{C2354EF9-D42B-93B5-4285-8DF444EB8C1D}"/>
-              </a:ext>
-            </a:extLst>
-          </p:cNvPr>
-          <p:cNvSpPr>
-            <a:spLocks noGrp="1"/>
-          </p:cNvSpPr>
-          <p:nvPr>
-            <p:ph type="body" idx="1"/>
-          </p:nvPr>
-        </p:nvSpPr>
-        <p:spPr/>
-        <p:txBody>
-          <a:bodyPr/>
-          <a:lstStyle/>
-          <a:p>
-            <a:r>
-              <a:rPr lang="zh-CN" altLang="en-US"/>
-              <a:t>施工线路长，声屏障高度高，结构型式多，工程体量大，占道施工。</a:t>
-            </a:r>
-          </a:p>
-          <a:p>
-            <a:endParaRPr lang="zh-CN" altLang="en-US"/>
-          </a:p>
-          <a:p>
-            <a:endParaRPr lang="zh-CN" altLang="en-US"/>
-          </a:p>
-          <a:p>
-            <a:endParaRPr lang="zh-CN" altLang="en-US"/>
-          </a:p>
-          <a:p>
-            <a:endParaRPr lang="zh-CN" altLang="en-US"/>
-          </a:p>
-        </p:txBody>
-      </p:sp>
-    </p:spTree>
-    <p:extLst>
-      <p:ext uri="{BB962C8B-B14F-4D97-AF65-F5344CB8AC3E}">
-        <p14:creationId xmlns:p14="http://schemas.microsoft.com/office/powerpoint/2010/main" val="3953349165"/>
-      </p:ext>
-    </p:extLst>
-  </p:cSld>
-  <p:clrMapOvr>
-    <a:masterClrMapping/>
-  </p:clrMapOvr>
-</p:notes>
-</file>
-
-<file path=ppt/notesSlides/notesSlide6.xml><?xml version="1.0" encoding="utf-8"?>
-<p:notes xmlns:a="http://schemas.openxmlformats.org/drawingml/2006/main" xmlns:r="http://schemas.openxmlformats.org/officeDocument/2006/relationships" xmlns:p="http://schemas.openxmlformats.org/presentationml/2006/main">
-  <p:cSld>
-    <p:spTree>
-      <p:nvGrpSpPr>
-        <p:cNvPr id="1" name="">
-          <a:extLst>
-            <a:ext uri="{FF2B5EF4-FFF2-40B4-BE49-F238E27FC236}">
-              <a16:creationId xmlns:a16="http://schemas.microsoft.com/office/drawing/2014/main" id="{0429FFE0-0670-2BDA-B9FF-E2896987C6A0}"/>
-            </a:ext>
-          </a:extLst>
-        </p:cNvPr>
-        <p:cNvGrpSpPr/>
-        <p:nvPr/>
-      </p:nvGrpSpPr>
-      <p:grpSpPr>
-        <a:xfrm>
-          <a:off x="0" y="0"/>
-          <a:ext cx="0" cy="0"/>
-          <a:chOff x="0" y="0"/>
-          <a:chExt cx="0" cy="0"/>
-        </a:xfrm>
-      </p:grpSpPr>
-      <p:sp>
-        <p:nvSpPr>
-          <p:cNvPr id="2" name="幻灯片图像占位符 1">
-            <a:extLst>
-              <a:ext uri="{FF2B5EF4-FFF2-40B4-BE49-F238E27FC236}">
-                <a16:creationId xmlns:a16="http://schemas.microsoft.com/office/drawing/2014/main" id="{C6C17483-FBBE-FD3D-79AA-3BEB9CB5E3F0}"/>
-              </a:ext>
-            </a:extLst>
-          </p:cNvPr>
-          <p:cNvSpPr>
-            <a:spLocks noGrp="1" noRot="1" noChangeAspect="1"/>
-          </p:cNvSpPr>
-          <p:nvPr>
-            <p:ph type="sldImg"/>
-          </p:nvPr>
-        </p:nvSpPr>
-        <p:spPr/>
-      </p:sp>
-      <p:sp>
-        <p:nvSpPr>
-          <p:cNvPr id="3" name="文本占位符 2">
-            <a:extLst>
-              <a:ext uri="{FF2B5EF4-FFF2-40B4-BE49-F238E27FC236}">
-                <a16:creationId xmlns:a16="http://schemas.microsoft.com/office/drawing/2014/main" id="{233C4F89-2D46-4EC8-9ED6-5EFA407D125B}"/>
-              </a:ext>
-            </a:extLst>
-          </p:cNvPr>
-          <p:cNvSpPr>
-            <a:spLocks noGrp="1"/>
-          </p:cNvSpPr>
-          <p:nvPr>
-            <p:ph type="body" idx="1"/>
-          </p:nvPr>
-        </p:nvSpPr>
-        <p:spPr/>
-        <p:txBody>
-          <a:bodyPr/>
-          <a:lstStyle/>
-          <a:p>
-            <a:r>
-              <a:rPr lang="zh-CN" altLang="en-US"/>
-              <a:t>施工线路长，声屏障高度高，结构型式多，工程体量大，占道施工。</a:t>
-            </a:r>
-          </a:p>
-          <a:p>
-            <a:endParaRPr lang="zh-CN" altLang="en-US"/>
-          </a:p>
-          <a:p>
-            <a:endParaRPr lang="zh-CN" altLang="en-US"/>
-          </a:p>
-          <a:p>
-            <a:endParaRPr lang="zh-CN" altLang="en-US"/>
-          </a:p>
-          <a:p>
-            <a:endParaRPr lang="zh-CN" altLang="en-US"/>
-          </a:p>
-        </p:txBody>
-      </p:sp>
-    </p:spTree>
-    <p:extLst>
-      <p:ext uri="{BB962C8B-B14F-4D97-AF65-F5344CB8AC3E}">
-        <p14:creationId xmlns:p14="http://schemas.microsoft.com/office/powerpoint/2010/main" val="2128397711"/>
-      </p:ext>
-    </p:extLst>
-  </p:cSld>
-  <p:clrMapOvr>
-    <a:masterClrMapping/>
-  </p:clrMapOvr>
-</p:notes>
-</file>
-
-<file path=ppt/notesSlides/notesSlide7.xml><?xml version="1.0" encoding="utf-8"?>
-<p:notes xmlns:a="http://schemas.openxmlformats.org/drawingml/2006/main" xmlns:r="http://schemas.openxmlformats.org/officeDocument/2006/relationships" xmlns:p="http://schemas.openxmlformats.org/presentationml/2006/main">
-  <p:cSld>
-    <p:spTree>
-      <p:nvGrpSpPr>
-        <p:cNvPr id="1" name="">
-          <a:extLst>
-            <a:ext uri="{FF2B5EF4-FFF2-40B4-BE49-F238E27FC236}">
-              <a16:creationId xmlns:a16="http://schemas.microsoft.com/office/drawing/2014/main" id="{3215446C-1D99-4CE5-0098-E1AAFAB46E0F}"/>
-            </a:ext>
-          </a:extLst>
-        </p:cNvPr>
-        <p:cNvGrpSpPr/>
-        <p:nvPr/>
-      </p:nvGrpSpPr>
-      <p:grpSpPr>
-        <a:xfrm>
-          <a:off x="0" y="0"/>
-          <a:ext cx="0" cy="0"/>
-          <a:chOff x="0" y="0"/>
-          <a:chExt cx="0" cy="0"/>
-        </a:xfrm>
-      </p:grpSpPr>
-      <p:sp>
-        <p:nvSpPr>
-          <p:cNvPr id="2" name="幻灯片图像占位符 1">
-            <a:extLst>
-              <a:ext uri="{FF2B5EF4-FFF2-40B4-BE49-F238E27FC236}">
-                <a16:creationId xmlns:a16="http://schemas.microsoft.com/office/drawing/2014/main" id="{870DE51B-A49D-35B2-DFFD-E88A239F4EE2}"/>
-              </a:ext>
-            </a:extLst>
-          </p:cNvPr>
-          <p:cNvSpPr>
-            <a:spLocks noGrp="1" noRot="1" noChangeAspect="1"/>
-          </p:cNvSpPr>
-          <p:nvPr>
-            <p:ph type="sldImg"/>
-          </p:nvPr>
-        </p:nvSpPr>
-        <p:spPr/>
-      </p:sp>
-      <p:sp>
-        <p:nvSpPr>
-          <p:cNvPr id="3" name="文本占位符 2">
-            <a:extLst>
-              <a:ext uri="{FF2B5EF4-FFF2-40B4-BE49-F238E27FC236}">
-                <a16:creationId xmlns:a16="http://schemas.microsoft.com/office/drawing/2014/main" id="{82E46648-C6BB-757C-2114-085C41EB339D}"/>
-              </a:ext>
-            </a:extLst>
-          </p:cNvPr>
-          <p:cNvSpPr>
-            <a:spLocks noGrp="1"/>
-          </p:cNvSpPr>
-          <p:nvPr>
-            <p:ph type="body" idx="1"/>
-          </p:nvPr>
-        </p:nvSpPr>
-        <p:spPr/>
-        <p:txBody>
-          <a:bodyPr/>
-          <a:lstStyle/>
-          <a:p>
-            <a:r>
-              <a:rPr lang="zh-CN" altLang="en-US"/>
-              <a:t>施工线路长，声屏障高度高，结构型式多，工程体量大，占道施工。</a:t>
-            </a:r>
-          </a:p>
-          <a:p>
-            <a:endParaRPr lang="zh-CN" altLang="en-US"/>
-          </a:p>
-          <a:p>
-            <a:endParaRPr lang="zh-CN" altLang="en-US"/>
-          </a:p>
-          <a:p>
-            <a:endParaRPr lang="zh-CN" altLang="en-US"/>
-          </a:p>
-          <a:p>
-            <a:endParaRPr lang="zh-CN" altLang="en-US"/>
-          </a:p>
-        </p:txBody>
-      </p:sp>
-    </p:spTree>
-    <p:extLst>
-      <p:ext uri="{BB962C8B-B14F-4D97-AF65-F5344CB8AC3E}">
-        <p14:creationId xmlns:p14="http://schemas.microsoft.com/office/powerpoint/2010/main" val="2961274737"/>
-      </p:ext>
-    </p:extLst>
-  </p:cSld>
-  <p:clrMapOvr>
-    <a:masterClrMapping/>
-  </p:clrMapOvr>
-</p:notes>
-</file>
-
-<file path=ppt/notesSlides/notesSlide8.xml><?xml version="1.0" encoding="utf-8"?>
-<p:notes xmlns:a="http://schemas.openxmlformats.org/drawingml/2006/main" xmlns:r="http://schemas.openxmlformats.org/officeDocument/2006/relationships" xmlns:p="http://schemas.openxmlformats.org/presentationml/2006/main">
-  <p:cSld>
-    <p:spTree>
-      <p:nvGrpSpPr>
-        <p:cNvPr id="1" name="">
-          <a:extLst>
-            <a:ext uri="{FF2B5EF4-FFF2-40B4-BE49-F238E27FC236}">
-              <a16:creationId xmlns:a16="http://schemas.microsoft.com/office/drawing/2014/main" id="{4209509F-0901-0E91-9173-53F9FCF70195}"/>
-            </a:ext>
-          </a:extLst>
-        </p:cNvPr>
-        <p:cNvGrpSpPr/>
-        <p:nvPr/>
-      </p:nvGrpSpPr>
-      <p:grpSpPr>
-        <a:xfrm>
-          <a:off x="0" y="0"/>
-          <a:ext cx="0" cy="0"/>
-          <a:chOff x="0" y="0"/>
-          <a:chExt cx="0" cy="0"/>
-        </a:xfrm>
-      </p:grpSpPr>
-      <p:sp>
-        <p:nvSpPr>
-          <p:cNvPr id="2" name="幻灯片图像占位符 1">
-            <a:extLst>
-              <a:ext uri="{FF2B5EF4-FFF2-40B4-BE49-F238E27FC236}">
-                <a16:creationId xmlns:a16="http://schemas.microsoft.com/office/drawing/2014/main" id="{083864E6-F8B4-FA0E-5605-7684937B325B}"/>
-              </a:ext>
-            </a:extLst>
-          </p:cNvPr>
-          <p:cNvSpPr>
-            <a:spLocks noGrp="1" noRot="1" noChangeAspect="1"/>
-          </p:cNvSpPr>
-          <p:nvPr>
-            <p:ph type="sldImg"/>
-          </p:nvPr>
-        </p:nvSpPr>
-        <p:spPr/>
-      </p:sp>
-      <p:sp>
-        <p:nvSpPr>
-          <p:cNvPr id="3" name="文本占位符 2">
-            <a:extLst>
-              <a:ext uri="{FF2B5EF4-FFF2-40B4-BE49-F238E27FC236}">
-                <a16:creationId xmlns:a16="http://schemas.microsoft.com/office/drawing/2014/main" id="{515A81C1-47AD-AC18-1132-2D27EE8F3F44}"/>
-              </a:ext>
-            </a:extLst>
-          </p:cNvPr>
-          <p:cNvSpPr>
-            <a:spLocks noGrp="1"/>
-          </p:cNvSpPr>
-          <p:nvPr>
-            <p:ph type="body" idx="1"/>
-          </p:nvPr>
-        </p:nvSpPr>
-        <p:spPr/>
-        <p:txBody>
-          <a:bodyPr/>
-          <a:lstStyle/>
-          <a:p>
-            <a:r>
-              <a:rPr lang="zh-CN" altLang="en-US"/>
-              <a:t>施工线路长，声屏障高度高，结构型式多，工程体量大，占道施工。</a:t>
-            </a:r>
-          </a:p>
-          <a:p>
-            <a:endParaRPr lang="zh-CN" altLang="en-US"/>
-          </a:p>
-          <a:p>
-            <a:endParaRPr lang="zh-CN" altLang="en-US"/>
-          </a:p>
-          <a:p>
-            <a:endParaRPr lang="zh-CN" altLang="en-US"/>
-          </a:p>
-          <a:p>
-            <a:endParaRPr lang="zh-CN" altLang="en-US"/>
-          </a:p>
-        </p:txBody>
-      </p:sp>
-    </p:spTree>
-    <p:extLst>
-      <p:ext uri="{BB962C8B-B14F-4D97-AF65-F5344CB8AC3E}">
-        <p14:creationId xmlns:p14="http://schemas.microsoft.com/office/powerpoint/2010/main" val="4168981323"/>
-      </p:ext>
-    </p:extLst>
-  </p:cSld>
-  <p:clrMapOvr>
-    <a:masterClrMapping/>
-  </p:clrMapOvr>
-</p:notes>
-</file>
-
-<file path=ppt/notesSlides/notesSlide9.xml><?xml version="1.0" encoding="utf-8"?>
-<p:notes xmlns:a="http://schemas.openxmlformats.org/drawingml/2006/main" xmlns:r="http://schemas.openxmlformats.org/officeDocument/2006/relationships" xmlns:p="http://schemas.openxmlformats.org/presentationml/2006/main">
-  <p:cSld>
-    <p:spTree>
-      <p:nvGrpSpPr>
-        <p:cNvPr id="1" name="">
-          <a:extLst>
-            <a:ext uri="{FF2B5EF4-FFF2-40B4-BE49-F238E27FC236}">
-              <a16:creationId xmlns:a16="http://schemas.microsoft.com/office/drawing/2014/main" id="{B3ACB3EA-1F29-E484-4610-F04A0DB127AE}"/>
-            </a:ext>
-          </a:extLst>
-        </p:cNvPr>
-        <p:cNvGrpSpPr/>
-        <p:nvPr/>
-      </p:nvGrpSpPr>
-      <p:grpSpPr>
-        <a:xfrm>
-          <a:off x="0" y="0"/>
-          <a:ext cx="0" cy="0"/>
-          <a:chOff x="0" y="0"/>
-          <a:chExt cx="0" cy="0"/>
-        </a:xfrm>
-      </p:grpSpPr>
-      <p:sp>
-        <p:nvSpPr>
-          <p:cNvPr id="2" name="幻灯片图像占位符 1">
-            <a:extLst>
-              <a:ext uri="{FF2B5EF4-FFF2-40B4-BE49-F238E27FC236}">
-                <a16:creationId xmlns:a16="http://schemas.microsoft.com/office/drawing/2014/main" id="{B8A704A6-A98D-E39A-B2AC-CD0E4A79C22B}"/>
-              </a:ext>
-            </a:extLst>
-          </p:cNvPr>
-          <p:cNvSpPr>
-            <a:spLocks noGrp="1" noRot="1" noChangeAspect="1"/>
-          </p:cNvSpPr>
-          <p:nvPr>
-            <p:ph type="sldImg"/>
-          </p:nvPr>
-        </p:nvSpPr>
-        <p:spPr/>
-      </p:sp>
-      <p:sp>
-        <p:nvSpPr>
-          <p:cNvPr id="3" name="文本占位符 2">
-            <a:extLst>
-              <a:ext uri="{FF2B5EF4-FFF2-40B4-BE49-F238E27FC236}">
-                <a16:creationId xmlns:a16="http://schemas.microsoft.com/office/drawing/2014/main" id="{D8EEDD07-B116-4DE9-0EA9-432FCAA962F1}"/>
-              </a:ext>
-            </a:extLst>
-          </p:cNvPr>
-          <p:cNvSpPr>
-            <a:spLocks noGrp="1"/>
-          </p:cNvSpPr>
-          <p:nvPr>
-            <p:ph type="body" idx="1"/>
-          </p:nvPr>
-        </p:nvSpPr>
-        <p:spPr/>
-        <p:txBody>
-          <a:bodyPr/>
-          <a:lstStyle/>
-          <a:p>
-            <a:r>
-              <a:rPr lang="zh-CN" altLang="en-US"/>
-              <a:t>施工线路长，声屏障高度高，结构型式多，工程体量大，占道施工。</a:t>
-            </a:r>
-          </a:p>
-          <a:p>
-            <a:endParaRPr lang="zh-CN" altLang="en-US"/>
-          </a:p>
-          <a:p>
-            <a:endParaRPr lang="zh-CN" altLang="en-US"/>
-          </a:p>
-          <a:p>
-            <a:endParaRPr lang="zh-CN" altLang="en-US"/>
-          </a:p>
-          <a:p>
-            <a:endParaRPr lang="zh-CN" altLang="en-US"/>
-          </a:p>
-        </p:txBody>
-      </p:sp>
-    </p:spTree>
-    <p:extLst>
-      <p:ext uri="{BB962C8B-B14F-4D97-AF65-F5344CB8AC3E}">
-        <p14:creationId xmlns:p14="http://schemas.microsoft.com/office/powerpoint/2010/main" val="3137130065"/>
       </p:ext>
     </p:extLst>
   </p:cSld>
@@ -2009,7 +1935,7 @@
           <a:p>
             <a:fld id="{760FBDFE-C587-4B4C-A407-44438C67B59E}" type="datetimeFigureOut">
               <a:rPr lang="zh-CN" altLang="en-US" smtClean="0"/>
-              <a:t>2026/5/26</a:t>
+              <a:t>2026/5/27</a:t>
             </a:fld>
             <a:endParaRPr lang="zh-CN" altLang="en-US"/>
           </a:p>
@@ -3801,606 +3727,6 @@
           <p:cNvPr id="4" name="组合 3">
             <a:extLst>
               <a:ext uri="{FF2B5EF4-FFF2-40B4-BE49-F238E27FC236}">
-                <a16:creationId xmlns:a16="http://schemas.microsoft.com/office/drawing/2014/main" id="{70E1E8F0-03DF-67C1-718D-CC2606C81257}"/>
-              </a:ext>
-            </a:extLst>
-          </p:cNvPr>
-          <p:cNvGrpSpPr/>
-          <p:nvPr/>
-        </p:nvGrpSpPr>
-        <p:grpSpPr>
-          <a:xfrm>
-            <a:off x="9577302" y="215877"/>
-            <a:ext cx="1695878" cy="706616"/>
-            <a:chOff x="9577302" y="1165376"/>
-            <a:chExt cx="1695878" cy="706616"/>
-          </a:xfrm>
-        </p:grpSpPr>
-        <p:sp>
-          <p:nvSpPr>
-            <p:cNvPr id="5" name="矩形 4">
-              <a:extLst>
-                <a:ext uri="{FF2B5EF4-FFF2-40B4-BE49-F238E27FC236}">
-                  <a16:creationId xmlns:a16="http://schemas.microsoft.com/office/drawing/2014/main" id="{C67A94AF-82DD-9C62-3252-B1AAAB06F14A}"/>
-                </a:ext>
-              </a:extLst>
-            </p:cNvPr>
-            <p:cNvSpPr/>
-            <p:nvPr/>
-          </p:nvSpPr>
-          <p:spPr>
-            <a:xfrm>
-              <a:off x="9721312" y="1295952"/>
-              <a:ext cx="1440100" cy="432030"/>
-            </a:xfrm>
-            <a:prstGeom prst="rect">
-              <a:avLst/>
-            </a:prstGeom>
-            <a:noFill/>
-            <a:ln>
-              <a:noFill/>
-            </a:ln>
-          </p:spPr>
-          <p:style>
-            <a:lnRef idx="2">
-              <a:schemeClr val="accent1">
-                <a:shade val="15000"/>
-              </a:schemeClr>
-            </a:lnRef>
-            <a:fillRef idx="1">
-              <a:schemeClr val="accent1"/>
-            </a:fillRef>
-            <a:effectRef idx="0">
-              <a:schemeClr val="accent1"/>
-            </a:effectRef>
-            <a:fontRef idx="minor">
-              <a:schemeClr val="lt1"/>
-            </a:fontRef>
-          </p:style>
-          <p:txBody>
-            <a:bodyPr rtlCol="0" anchor="ctr"/>
-            <a:lstStyle/>
-            <a:p>
-              <a:pPr algn="ctr"/>
-              <a:endParaRPr lang="zh-CN" altLang="en-US"/>
-            </a:p>
-          </p:txBody>
-        </p:sp>
-        <p:pic>
-          <p:nvPicPr>
-            <p:cNvPr id="6" name="图片 5">
-              <a:extLst>
-                <a:ext uri="{FF2B5EF4-FFF2-40B4-BE49-F238E27FC236}">
-                  <a16:creationId xmlns:a16="http://schemas.microsoft.com/office/drawing/2014/main" id="{B7B2F0C3-3D69-FBB1-F075-86125F633686}"/>
-                </a:ext>
-              </a:extLst>
-            </p:cNvPr>
-            <p:cNvPicPr>
-              <a:picLocks noChangeAspect="1"/>
-            </p:cNvPicPr>
-            <p:nvPr/>
-          </p:nvPicPr>
-          <p:blipFill>
-            <a:blip r:embed="rId3">
-              <a:extLst>
-                <a:ext uri="{28A0092B-C50C-407E-A947-70E740481C1C}">
-                  <a14:useLocalDpi xmlns:a14="http://schemas.microsoft.com/office/drawing/2010/main" val="0"/>
-                </a:ext>
-              </a:extLst>
-            </a:blip>
-            <a:stretch>
-              <a:fillRect/>
-            </a:stretch>
-          </p:blipFill>
-          <p:spPr>
-            <a:xfrm>
-              <a:off x="9577302" y="1165376"/>
-              <a:ext cx="1695878" cy="706616"/>
-            </a:xfrm>
-            <a:prstGeom prst="rect">
-              <a:avLst/>
-            </a:prstGeom>
-          </p:spPr>
-        </p:pic>
-      </p:grpSp>
-    </p:spTree>
-  </p:cSld>
-  <p:clrMapOvr>
-    <a:masterClrMapping/>
-  </p:clrMapOvr>
-  <p:transition spd="med"/>
-</p:sld>
-</file>
-
-<file path=ppt/slides/slide10.xml><?xml version="1.0" encoding="utf-8"?>
-<p:sld xmlns:a="http://schemas.openxmlformats.org/drawingml/2006/main" xmlns:r="http://schemas.openxmlformats.org/officeDocument/2006/relationships" xmlns:p="http://schemas.openxmlformats.org/presentationml/2006/main">
-  <p:cSld>
-    <p:spTree>
-      <p:nvGrpSpPr>
-        <p:cNvPr id="1" name="">
-          <a:extLst>
-            <a:ext uri="{FF2B5EF4-FFF2-40B4-BE49-F238E27FC236}">
-              <a16:creationId xmlns:a16="http://schemas.microsoft.com/office/drawing/2014/main" id="{E6933D33-285C-212C-0ED5-7560495494ED}"/>
-            </a:ext>
-          </a:extLst>
-        </p:cNvPr>
-        <p:cNvGrpSpPr/>
-        <p:nvPr/>
-      </p:nvGrpSpPr>
-      <p:grpSpPr>
-        <a:xfrm>
-          <a:off x="0" y="0"/>
-          <a:ext cx="0" cy="0"/>
-          <a:chOff x="0" y="0"/>
-          <a:chExt cx="0" cy="0"/>
-        </a:xfrm>
-      </p:grpSpPr>
-      <p:sp>
-        <p:nvSpPr>
-          <p:cNvPr id="7" name="矩形 6">
-            <a:extLst>
-              <a:ext uri="{FF2B5EF4-FFF2-40B4-BE49-F238E27FC236}">
-                <a16:creationId xmlns:a16="http://schemas.microsoft.com/office/drawing/2014/main" id="{09F486A6-F639-44E6-E1EE-FD3769E2A2B2}"/>
-              </a:ext>
-            </a:extLst>
-          </p:cNvPr>
-          <p:cNvSpPr/>
-          <p:nvPr/>
-        </p:nvSpPr>
-        <p:spPr>
-          <a:xfrm>
-            <a:off x="725473" y="314613"/>
-            <a:ext cx="4583283" cy="554191"/>
-          </a:xfrm>
-          <a:prstGeom prst="rect">
-            <a:avLst/>
-          </a:prstGeom>
-        </p:spPr>
-        <p:txBody>
-          <a:bodyPr wrap="square">
-            <a:spAutoFit/>
-          </a:bodyPr>
-          <a:lstStyle/>
-          <a:p>
-            <a:pPr>
-              <a:lnSpc>
-                <a:spcPct val="150000"/>
-              </a:lnSpc>
-            </a:pPr>
-            <a:r>
-              <a:rPr lang="zh-CN" altLang="en-US" sz="2268" b="1" spc="150" dirty="0">
-                <a:solidFill>
-                  <a:srgbClr val="0064A8"/>
-                </a:solidFill>
-                <a:latin typeface="微软雅黑" panose="020B0503020204020204" charset="-122"/>
-                <a:ea typeface="微软雅黑" panose="020B0503020204020204" charset="-122"/>
-                <a:cs typeface="Arial" panose="020B0604020202020204" pitchFamily="34" charset="0"/>
-                <a:sym typeface="+mn-ea"/>
-              </a:rPr>
-              <a:t>九、重难点应对措施 </a:t>
-            </a:r>
-          </a:p>
-        </p:txBody>
-      </p:sp>
-      <p:sp>
-        <p:nvSpPr>
-          <p:cNvPr id="2" name="文本框 1">
-            <a:extLst>
-              <a:ext uri="{FF2B5EF4-FFF2-40B4-BE49-F238E27FC236}">
-                <a16:creationId xmlns:a16="http://schemas.microsoft.com/office/drawing/2014/main" id="{2AF4A518-B4D0-CDFF-9100-85DDDCC97235}"/>
-              </a:ext>
-            </a:extLst>
-          </p:cNvPr>
-          <p:cNvSpPr txBox="1"/>
-          <p:nvPr/>
-        </p:nvSpPr>
-        <p:spPr>
-          <a:xfrm>
-            <a:off x="521888" y="858329"/>
-            <a:ext cx="10353880" cy="339452"/>
-          </a:xfrm>
-          <a:prstGeom prst="rect">
-            <a:avLst/>
-          </a:prstGeom>
-        </p:spPr>
-        <p:txBody>
-          <a:bodyPr wrap="square">
-            <a:spAutoFit/>
-          </a:bodyPr>
-          <a:lstStyle/>
-          <a:p>
-            <a:pPr indent="336006" defTabSz="252005"/>
-            <a:r>
-              <a:rPr lang="en-US" altLang="zh-CN" sz="1606" dirty="0"/>
-              <a:t>{{m3_solution_summary}}</a:t>
-            </a:r>
-            <a:endParaRPr lang="zh-CN" altLang="en-US" sz="1323" dirty="0">
-              <a:latin typeface="微软雅黑" panose="020B0503020204020204" charset="-122"/>
-              <a:ea typeface="微软雅黑" panose="020B0503020204020204" charset="-122"/>
-              <a:cs typeface="微软雅黑" panose="020B0503020204020204" charset="-122"/>
-            </a:endParaRPr>
-          </a:p>
-        </p:txBody>
-      </p:sp>
-      <p:sp>
-        <p:nvSpPr>
-          <p:cNvPr id="9224" name="{{image:project_scope_map}}">
-            <a:extLst>
-              <a:ext uri="{FF2B5EF4-FFF2-40B4-BE49-F238E27FC236}">
-                <a16:creationId xmlns:a16="http://schemas.microsoft.com/office/drawing/2014/main" id="{5A354D15-F658-159F-D8E4-363B964DF3BF}"/>
-              </a:ext>
-            </a:extLst>
-          </p:cNvPr>
-          <p:cNvSpPr txBox="1"/>
-          <p:nvPr/>
-        </p:nvSpPr>
-        <p:spPr>
-          <a:xfrm>
-            <a:off x="930134" y="1879269"/>
-            <a:ext cx="9133446" cy="4414817"/>
-          </a:xfrm>
-          <a:prstGeom prst="rect">
-            <a:avLst/>
-          </a:prstGeom>
-          <a:solidFill>
-            <a:srgbClr val="F3F7FB"/>
-          </a:solidFill>
-          <a:ln w="15875">
-            <a:solidFill>
-              <a:srgbClr val="1565C0"/>
-            </a:solidFill>
-          </a:ln>
-        </p:spPr>
-        <p:txBody>
-          <a:bodyPr wrap="square">
-            <a:noAutofit/>
-          </a:bodyPr>
-          <a:lstStyle/>
-          <a:p>
-            <a:pPr algn="l"/>
-            <a:r>
-              <a:rPr lang="en-US" sz="1323" b="1" dirty="0">
-                <a:solidFill>
-                  <a:srgbClr val="1565C0"/>
-                </a:solidFill>
-                <a:latin typeface="Microsoft YaHei"/>
-              </a:rPr>
-              <a:t>{{image:m3_solution}}</a:t>
-            </a:r>
-            <a:endParaRPr sz="1323" b="1" dirty="0">
-              <a:solidFill>
-                <a:srgbClr val="1565C0"/>
-              </a:solidFill>
-              <a:latin typeface="Microsoft YaHei"/>
-            </a:endParaRPr>
-          </a:p>
-        </p:txBody>
-      </p:sp>
-      <p:grpSp>
-        <p:nvGrpSpPr>
-          <p:cNvPr id="4" name="组合 3">
-            <a:extLst>
-              <a:ext uri="{FF2B5EF4-FFF2-40B4-BE49-F238E27FC236}">
-                <a16:creationId xmlns:a16="http://schemas.microsoft.com/office/drawing/2014/main" id="{B10F0998-593C-1229-EF85-BF74A39DAEDB}"/>
-              </a:ext>
-            </a:extLst>
-          </p:cNvPr>
-          <p:cNvGrpSpPr/>
-          <p:nvPr/>
-        </p:nvGrpSpPr>
-        <p:grpSpPr>
-          <a:xfrm>
-            <a:off x="9577302" y="215877"/>
-            <a:ext cx="1695878" cy="706616"/>
-            <a:chOff x="9577302" y="1165376"/>
-            <a:chExt cx="1695878" cy="706616"/>
-          </a:xfrm>
-        </p:grpSpPr>
-        <p:sp>
-          <p:nvSpPr>
-            <p:cNvPr id="5" name="矩形 4">
-              <a:extLst>
-                <a:ext uri="{FF2B5EF4-FFF2-40B4-BE49-F238E27FC236}">
-                  <a16:creationId xmlns:a16="http://schemas.microsoft.com/office/drawing/2014/main" id="{1A9FBEB9-AEF8-632C-6BBF-CBEFF3CB7282}"/>
-                </a:ext>
-              </a:extLst>
-            </p:cNvPr>
-            <p:cNvSpPr/>
-            <p:nvPr/>
-          </p:nvSpPr>
-          <p:spPr>
-            <a:xfrm>
-              <a:off x="9721312" y="1295952"/>
-              <a:ext cx="1440100" cy="432030"/>
-            </a:xfrm>
-            <a:prstGeom prst="rect">
-              <a:avLst/>
-            </a:prstGeom>
-            <a:noFill/>
-            <a:ln>
-              <a:noFill/>
-            </a:ln>
-          </p:spPr>
-          <p:style>
-            <a:lnRef idx="2">
-              <a:schemeClr val="accent1">
-                <a:shade val="15000"/>
-              </a:schemeClr>
-            </a:lnRef>
-            <a:fillRef idx="1">
-              <a:schemeClr val="accent1"/>
-            </a:fillRef>
-            <a:effectRef idx="0">
-              <a:schemeClr val="accent1"/>
-            </a:effectRef>
-            <a:fontRef idx="minor">
-              <a:schemeClr val="lt1"/>
-            </a:fontRef>
-          </p:style>
-          <p:txBody>
-            <a:bodyPr rtlCol="0" anchor="ctr"/>
-            <a:lstStyle/>
-            <a:p>
-              <a:pPr algn="ctr"/>
-              <a:endParaRPr lang="zh-CN" altLang="en-US"/>
-            </a:p>
-          </p:txBody>
-        </p:sp>
-        <p:pic>
-          <p:nvPicPr>
-            <p:cNvPr id="6" name="图片 5">
-              <a:extLst>
-                <a:ext uri="{FF2B5EF4-FFF2-40B4-BE49-F238E27FC236}">
-                  <a16:creationId xmlns:a16="http://schemas.microsoft.com/office/drawing/2014/main" id="{BCC37DA1-4229-BBB2-ABC5-E7838760362B}"/>
-                </a:ext>
-              </a:extLst>
-            </p:cNvPr>
-            <p:cNvPicPr>
-              <a:picLocks noChangeAspect="1"/>
-            </p:cNvPicPr>
-            <p:nvPr/>
-          </p:nvPicPr>
-          <p:blipFill>
-            <a:blip r:embed="rId3">
-              <a:extLst>
-                <a:ext uri="{28A0092B-C50C-407E-A947-70E740481C1C}">
-                  <a14:useLocalDpi xmlns:a14="http://schemas.microsoft.com/office/drawing/2010/main" val="0"/>
-                </a:ext>
-              </a:extLst>
-            </a:blip>
-            <a:stretch>
-              <a:fillRect/>
-            </a:stretch>
-          </p:blipFill>
-          <p:spPr>
-            <a:xfrm>
-              <a:off x="9577302" y="1165376"/>
-              <a:ext cx="1695878" cy="706616"/>
-            </a:xfrm>
-            <a:prstGeom prst="rect">
-              <a:avLst/>
-            </a:prstGeom>
-          </p:spPr>
-        </p:pic>
-      </p:grpSp>
-    </p:spTree>
-    <p:extLst>
-      <p:ext uri="{BB962C8B-B14F-4D97-AF65-F5344CB8AC3E}">
-        <p14:creationId xmlns:p14="http://schemas.microsoft.com/office/powerpoint/2010/main" val="794731086"/>
-      </p:ext>
-    </p:extLst>
-  </p:cSld>
-  <p:clrMapOvr>
-    <a:masterClrMapping/>
-  </p:clrMapOvr>
-  <p:transition spd="med"/>
-</p:sld>
-</file>
-
-<file path=ppt/slides/slide2.xml><?xml version="1.0" encoding="utf-8"?>
-<p:sld xmlns:a="http://schemas.openxmlformats.org/drawingml/2006/main" xmlns:r="http://schemas.openxmlformats.org/officeDocument/2006/relationships" xmlns:p="http://schemas.openxmlformats.org/presentationml/2006/main">
-  <p:cSld>
-    <p:spTree>
-      <p:nvGrpSpPr>
-        <p:cNvPr id="1" name=""/>
-        <p:cNvGrpSpPr/>
-        <p:nvPr/>
-      </p:nvGrpSpPr>
-      <p:grpSpPr>
-        <a:xfrm>
-          <a:off x="0" y="0"/>
-          <a:ext cx="0" cy="0"/>
-          <a:chOff x="0" y="0"/>
-          <a:chExt cx="0" cy="0"/>
-        </a:xfrm>
-      </p:grpSpPr>
-      <p:sp>
-        <p:nvSpPr>
-          <p:cNvPr id="7" name="矩形 6"/>
-          <p:cNvSpPr/>
-          <p:nvPr/>
-        </p:nvSpPr>
-        <p:spPr>
-          <a:xfrm>
-            <a:off x="725473" y="314613"/>
-            <a:ext cx="4583283" cy="554191"/>
-          </a:xfrm>
-          <a:prstGeom prst="rect">
-            <a:avLst/>
-          </a:prstGeom>
-        </p:spPr>
-        <p:txBody>
-          <a:bodyPr wrap="square">
-            <a:spAutoFit/>
-          </a:bodyPr>
-          <a:lstStyle/>
-          <a:p>
-            <a:pPr>
-              <a:lnSpc>
-                <a:spcPct val="150000"/>
-              </a:lnSpc>
-            </a:pPr>
-            <a:r>
-              <a:rPr lang="zh-CN" altLang="en-US" sz="2268" b="1" spc="150">
-                <a:solidFill>
-                  <a:srgbClr val="0064A8"/>
-                </a:solidFill>
-                <a:latin typeface="微软雅黑" panose="020B0503020204020204" charset="-122"/>
-                <a:ea typeface="微软雅黑" panose="020B0503020204020204" charset="-122"/>
-                <a:cs typeface="Arial" panose="020B0604020202020204" pitchFamily="34" charset="0"/>
-              </a:rPr>
-              <a:t>一、项目基本情况 </a:t>
-            </a:r>
-            <a:endParaRPr lang="zh-CN" altLang="en-US" sz="2268" b="1" spc="150" dirty="0">
-              <a:solidFill>
-                <a:srgbClr val="0064A8"/>
-              </a:solidFill>
-              <a:latin typeface="微软雅黑" panose="020B0503020204020204" charset="-122"/>
-              <a:ea typeface="微软雅黑" panose="020B0503020204020204" charset="-122"/>
-              <a:cs typeface="Arial" panose="020B0604020202020204" pitchFamily="34" charset="0"/>
-            </a:endParaRPr>
-          </a:p>
-        </p:txBody>
-      </p:sp>
-      <p:sp>
-        <p:nvSpPr>
-          <p:cNvPr id="2" name="文本框 1"/>
-          <p:cNvSpPr txBox="1"/>
-          <p:nvPr/>
-        </p:nvSpPr>
-        <p:spPr>
-          <a:xfrm>
-            <a:off x="521888" y="858329"/>
-            <a:ext cx="10353880" cy="339452"/>
-          </a:xfrm>
-          <a:prstGeom prst="rect">
-            <a:avLst/>
-          </a:prstGeom>
-        </p:spPr>
-        <p:txBody>
-          <a:bodyPr wrap="square">
-            <a:spAutoFit/>
-          </a:bodyPr>
-          <a:lstStyle/>
-          <a:p>
-            <a:pPr indent="336006" defTabSz="252005"/>
-            <a:r>
-              <a:rPr sz="1606" dirty="0"/>
-              <a:t>{{m3_basic_summary}}</a:t>
-            </a:r>
-            <a:endParaRPr lang="zh-CN" altLang="en-US" sz="1323" dirty="0">
-              <a:latin typeface="微软雅黑" panose="020B0503020204020204" charset="-122"/>
-              <a:ea typeface="微软雅黑" panose="020B0503020204020204" charset="-122"/>
-              <a:cs typeface="微软雅黑" panose="020B0503020204020204" charset="-122"/>
-            </a:endParaRPr>
-          </a:p>
-        </p:txBody>
-      </p:sp>
-      <p:sp>
-        <p:nvSpPr>
-          <p:cNvPr id="9222" name="TextBox 9221"/>
-          <p:cNvSpPr txBox="1"/>
-          <p:nvPr/>
-        </p:nvSpPr>
-        <p:spPr>
-          <a:xfrm>
-            <a:off x="432893" y="432011"/>
-            <a:ext cx="184731" cy="339452"/>
-          </a:xfrm>
-          <a:prstGeom prst="rect">
-            <a:avLst/>
-          </a:prstGeom>
-          <a:noFill/>
-        </p:spPr>
-        <p:txBody>
-          <a:bodyPr wrap="none">
-            <a:spAutoFit/>
-          </a:bodyPr>
-          <a:lstStyle/>
-          <a:p>
-            <a:endParaRPr sz="1606"/>
-          </a:p>
-        </p:txBody>
-      </p:sp>
-      <p:sp>
-        <p:nvSpPr>
-          <p:cNvPr id="9223" name="TextBox 9222"/>
-          <p:cNvSpPr txBox="1"/>
-          <p:nvPr/>
-        </p:nvSpPr>
-        <p:spPr>
-          <a:xfrm>
-            <a:off x="432893" y="432011"/>
-            <a:ext cx="184731" cy="339452"/>
-          </a:xfrm>
-          <a:prstGeom prst="rect">
-            <a:avLst/>
-          </a:prstGeom>
-          <a:noFill/>
-        </p:spPr>
-        <p:txBody>
-          <a:bodyPr wrap="none">
-            <a:spAutoFit/>
-          </a:bodyPr>
-          <a:lstStyle/>
-          <a:p>
-            <a:endParaRPr sz="1606"/>
-          </a:p>
-        </p:txBody>
-      </p:sp>
-      <p:sp>
-        <p:nvSpPr>
-          <p:cNvPr id="9224" name="{{image:project_scope_map}}"/>
-          <p:cNvSpPr txBox="1"/>
-          <p:nvPr/>
-        </p:nvSpPr>
-        <p:spPr>
-          <a:xfrm>
-            <a:off x="930134" y="1879269"/>
-            <a:ext cx="9133446" cy="4414817"/>
-          </a:xfrm>
-          <a:prstGeom prst="rect">
-            <a:avLst/>
-          </a:prstGeom>
-          <a:solidFill>
-            <a:srgbClr val="F3F7FB"/>
-          </a:solidFill>
-          <a:ln w="15875">
-            <a:solidFill>
-              <a:srgbClr val="1565C0"/>
-            </a:solidFill>
-          </a:ln>
-        </p:spPr>
-        <p:txBody>
-          <a:bodyPr wrap="square">
-            <a:noAutofit/>
-          </a:bodyPr>
-          <a:lstStyle/>
-          <a:p>
-            <a:pPr algn="l"/>
-            <a:r>
-              <a:rPr lang="en-US" sz="1323" b="1" dirty="0">
-                <a:solidFill>
-                  <a:srgbClr val="1565C0"/>
-                </a:solidFill>
-                <a:latin typeface="Microsoft YaHei"/>
-              </a:rPr>
-              <a:t>{{image:m3_basic}}</a:t>
-            </a:r>
-            <a:endParaRPr sz="1323" b="1" dirty="0">
-              <a:solidFill>
-                <a:srgbClr val="1565C0"/>
-              </a:solidFill>
-              <a:latin typeface="Microsoft YaHei"/>
-            </a:endParaRPr>
-          </a:p>
-        </p:txBody>
-      </p:sp>
-      <p:grpSp>
-        <p:nvGrpSpPr>
-          <p:cNvPr id="4" name="组合 3">
-            <a:extLst>
-              <a:ext uri="{FF2B5EF4-FFF2-40B4-BE49-F238E27FC236}">
                 <a16:creationId xmlns:a16="http://schemas.microsoft.com/office/drawing/2014/main" id="{1705C1A7-D138-7FDA-B308-58D7A0B62F5C}"/>
               </a:ext>
             </a:extLst>
@@ -4512,7 +3838,7 @@
 </p:sld>
 </file>
 
-<file path=ppt/slides/slide3.xml><?xml version="1.0" encoding="utf-8"?>
+<file path=ppt/slides/slide2.xml><?xml version="1.0" encoding="utf-8"?>
 <p:sld xmlns:a="http://schemas.openxmlformats.org/drawingml/2006/main" xmlns:r="http://schemas.openxmlformats.org/officeDocument/2006/relationships" xmlns:p="http://schemas.openxmlformats.org/presentationml/2006/main">
   <p:cSld>
     <p:spTree>
@@ -4796,7 +4122,7 @@
 </p:sld>
 </file>
 
-<file path=ppt/slides/slide4.xml><?xml version="1.0" encoding="utf-8"?>
+<file path=ppt/slides/slide3.xml><?xml version="1.0" encoding="utf-8"?>
 <p:sld xmlns:a="http://schemas.openxmlformats.org/drawingml/2006/main" xmlns:r="http://schemas.openxmlformats.org/officeDocument/2006/relationships" xmlns:p="http://schemas.openxmlformats.org/presentationml/2006/main">
   <p:cSld>
     <p:spTree>
@@ -5080,7 +4406,7 @@
 </p:sld>
 </file>
 
-<file path=ppt/slides/slide5.xml><?xml version="1.0" encoding="utf-8"?>
+<file path=ppt/slides/slide4.xml><?xml version="1.0" encoding="utf-8"?>
 <p:sld xmlns:a="http://schemas.openxmlformats.org/drawingml/2006/main" xmlns:r="http://schemas.openxmlformats.org/officeDocument/2006/relationships" xmlns:p="http://schemas.openxmlformats.org/presentationml/2006/main">
   <p:cSld>
     <p:spTree>
@@ -5364,7 +4690,7 @@
 </p:sld>
 </file>
 
-<file path=ppt/slides/slide6.xml><?xml version="1.0" encoding="utf-8"?>
+<file path=ppt/slides/slide5.xml><?xml version="1.0" encoding="utf-8"?>
 <p:sld xmlns:a="http://schemas.openxmlformats.org/drawingml/2006/main" xmlns:r="http://schemas.openxmlformats.org/officeDocument/2006/relationships" xmlns:p="http://schemas.openxmlformats.org/presentationml/2006/main">
   <p:cSld>
     <p:spTree>
@@ -5659,7 +4985,7 @@
 </p:sld>
 </file>
 
-<file path=ppt/slides/slide7.xml><?xml version="1.0" encoding="utf-8"?>
+<file path=ppt/slides/slide6.xml><?xml version="1.0" encoding="utf-8"?>
 <p:sld xmlns:a="http://schemas.openxmlformats.org/drawingml/2006/main" xmlns:r="http://schemas.openxmlformats.org/officeDocument/2006/relationships" xmlns:p="http://schemas.openxmlformats.org/presentationml/2006/main">
   <p:cSld>
     <p:spTree>
@@ -5943,7 +5269,7 @@
 </p:sld>
 </file>
 
-<file path=ppt/slides/slide8.xml><?xml version="1.0" encoding="utf-8"?>
+<file path=ppt/slides/slide7.xml><?xml version="1.0" encoding="utf-8"?>
 <p:sld xmlns:a="http://schemas.openxmlformats.org/drawingml/2006/main" xmlns:r="http://schemas.openxmlformats.org/officeDocument/2006/relationships" xmlns:p="http://schemas.openxmlformats.org/presentationml/2006/main">
   <p:cSld>
     <p:spTree>
@@ -6228,7 +5554,7 @@
 </p:sld>
 </file>
 
-<file path=ppt/slides/slide9.xml><?xml version="1.0" encoding="utf-8"?>
+<file path=ppt/slides/slide8.xml><?xml version="1.0" encoding="utf-8"?>
 <p:sld xmlns:a="http://schemas.openxmlformats.org/drawingml/2006/main" xmlns:r="http://schemas.openxmlformats.org/officeDocument/2006/relationships" xmlns:p="http://schemas.openxmlformats.org/presentationml/2006/main">
   <p:cSld>
     <p:spTree>
@@ -6503,6 +5829,291 @@
     <p:extLst>
       <p:ext uri="{BB962C8B-B14F-4D97-AF65-F5344CB8AC3E}">
         <p14:creationId xmlns:p14="http://schemas.microsoft.com/office/powerpoint/2010/main" val="4098451426"/>
+      </p:ext>
+    </p:extLst>
+  </p:cSld>
+  <p:clrMapOvr>
+    <a:masterClrMapping/>
+  </p:clrMapOvr>
+  <p:transition spd="med"/>
+</p:sld>
+</file>
+
+<file path=ppt/slides/slide9.xml><?xml version="1.0" encoding="utf-8"?>
+<p:sld xmlns:a="http://schemas.openxmlformats.org/drawingml/2006/main" xmlns:r="http://schemas.openxmlformats.org/officeDocument/2006/relationships" xmlns:p="http://schemas.openxmlformats.org/presentationml/2006/main">
+  <p:cSld>
+    <p:spTree>
+      <p:nvGrpSpPr>
+        <p:cNvPr id="1" name="">
+          <a:extLst>
+            <a:ext uri="{FF2B5EF4-FFF2-40B4-BE49-F238E27FC236}">
+              <a16:creationId xmlns:a16="http://schemas.microsoft.com/office/drawing/2014/main" id="{E6933D33-285C-212C-0ED5-7560495494ED}"/>
+            </a:ext>
+          </a:extLst>
+        </p:cNvPr>
+        <p:cNvGrpSpPr/>
+        <p:nvPr/>
+      </p:nvGrpSpPr>
+      <p:grpSpPr>
+        <a:xfrm>
+          <a:off x="0" y="0"/>
+          <a:ext cx="0" cy="0"/>
+          <a:chOff x="0" y="0"/>
+          <a:chExt cx="0" cy="0"/>
+        </a:xfrm>
+      </p:grpSpPr>
+      <p:sp>
+        <p:nvSpPr>
+          <p:cNvPr id="7" name="矩形 6">
+            <a:extLst>
+              <a:ext uri="{FF2B5EF4-FFF2-40B4-BE49-F238E27FC236}">
+                <a16:creationId xmlns:a16="http://schemas.microsoft.com/office/drawing/2014/main" id="{09F486A6-F639-44E6-E1EE-FD3769E2A2B2}"/>
+              </a:ext>
+            </a:extLst>
+          </p:cNvPr>
+          <p:cNvSpPr/>
+          <p:nvPr/>
+        </p:nvSpPr>
+        <p:spPr>
+          <a:xfrm>
+            <a:off x="725473" y="314613"/>
+            <a:ext cx="4583283" cy="554191"/>
+          </a:xfrm>
+          <a:prstGeom prst="rect">
+            <a:avLst/>
+          </a:prstGeom>
+        </p:spPr>
+        <p:txBody>
+          <a:bodyPr wrap="square">
+            <a:spAutoFit/>
+          </a:bodyPr>
+          <a:lstStyle/>
+          <a:p>
+            <a:pPr>
+              <a:lnSpc>
+                <a:spcPct val="150000"/>
+              </a:lnSpc>
+            </a:pPr>
+            <a:r>
+              <a:rPr lang="zh-CN" altLang="en-US" sz="2268" b="1" spc="150" dirty="0">
+                <a:solidFill>
+                  <a:srgbClr val="0064A8"/>
+                </a:solidFill>
+                <a:latin typeface="微软雅黑" panose="020B0503020204020204" charset="-122"/>
+                <a:ea typeface="微软雅黑" panose="020B0503020204020204" charset="-122"/>
+                <a:cs typeface="Arial" panose="020B0604020202020204" pitchFamily="34" charset="0"/>
+                <a:sym typeface="+mn-ea"/>
+              </a:rPr>
+              <a:t>九、重难点应对措施 </a:t>
+            </a:r>
+          </a:p>
+        </p:txBody>
+      </p:sp>
+      <p:sp>
+        <p:nvSpPr>
+          <p:cNvPr id="2" name="文本框 1">
+            <a:extLst>
+              <a:ext uri="{FF2B5EF4-FFF2-40B4-BE49-F238E27FC236}">
+                <a16:creationId xmlns:a16="http://schemas.microsoft.com/office/drawing/2014/main" id="{2AF4A518-B4D0-CDFF-9100-85DDDCC97235}"/>
+              </a:ext>
+            </a:extLst>
+          </p:cNvPr>
+          <p:cNvSpPr txBox="1"/>
+          <p:nvPr/>
+        </p:nvSpPr>
+        <p:spPr>
+          <a:xfrm>
+            <a:off x="521888" y="858329"/>
+            <a:ext cx="10353880" cy="339452"/>
+          </a:xfrm>
+          <a:prstGeom prst="rect">
+            <a:avLst/>
+          </a:prstGeom>
+        </p:spPr>
+        <p:txBody>
+          <a:bodyPr wrap="square">
+            <a:spAutoFit/>
+          </a:bodyPr>
+          <a:lstStyle/>
+          <a:p>
+            <a:pPr indent="336006" defTabSz="252005"/>
+            <a:r>
+              <a:rPr lang="en-US" altLang="zh-CN" sz="1606" dirty="0"/>
+              <a:t>{{m3_solution_summary}}</a:t>
+            </a:r>
+            <a:endParaRPr lang="zh-CN" altLang="en-US" sz="1323" dirty="0">
+              <a:latin typeface="微软雅黑" panose="020B0503020204020204" charset="-122"/>
+              <a:ea typeface="微软雅黑" panose="020B0503020204020204" charset="-122"/>
+              <a:cs typeface="微软雅黑" panose="020B0503020204020204" charset="-122"/>
+            </a:endParaRPr>
+          </a:p>
+        </p:txBody>
+      </p:sp>
+      <p:sp>
+        <p:nvSpPr>
+          <p:cNvPr id="9224" name="{{image:project_scope_map}}">
+            <a:extLst>
+              <a:ext uri="{FF2B5EF4-FFF2-40B4-BE49-F238E27FC236}">
+                <a16:creationId xmlns:a16="http://schemas.microsoft.com/office/drawing/2014/main" id="{5A354D15-F658-159F-D8E4-363B964DF3BF}"/>
+              </a:ext>
+            </a:extLst>
+          </p:cNvPr>
+          <p:cNvSpPr txBox="1"/>
+          <p:nvPr/>
+        </p:nvSpPr>
+        <p:spPr>
+          <a:xfrm>
+            <a:off x="930134" y="1879269"/>
+            <a:ext cx="9133446" cy="4414817"/>
+          </a:xfrm>
+          <a:prstGeom prst="rect">
+            <a:avLst/>
+          </a:prstGeom>
+          <a:solidFill>
+            <a:srgbClr val="F3F7FB"/>
+          </a:solidFill>
+          <a:ln w="15875">
+            <a:solidFill>
+              <a:srgbClr val="1565C0"/>
+            </a:solidFill>
+          </a:ln>
+        </p:spPr>
+        <p:txBody>
+          <a:bodyPr wrap="square">
+            <a:noAutofit/>
+          </a:bodyPr>
+          <a:lstStyle/>
+          <a:p>
+            <a:pPr algn="l"/>
+            <a:r>
+              <a:rPr lang="en-US" sz="1323" b="1" dirty="0">
+                <a:solidFill>
+                  <a:srgbClr val="1565C0"/>
+                </a:solidFill>
+                <a:latin typeface="Microsoft YaHei"/>
+              </a:rPr>
+              <a:t>{{image:m3_solution}}</a:t>
+            </a:r>
+            <a:endParaRPr sz="1323" b="1" dirty="0">
+              <a:solidFill>
+                <a:srgbClr val="1565C0"/>
+              </a:solidFill>
+              <a:latin typeface="Microsoft YaHei"/>
+            </a:endParaRPr>
+          </a:p>
+        </p:txBody>
+      </p:sp>
+      <p:grpSp>
+        <p:nvGrpSpPr>
+          <p:cNvPr id="4" name="组合 3">
+            <a:extLst>
+              <a:ext uri="{FF2B5EF4-FFF2-40B4-BE49-F238E27FC236}">
+                <a16:creationId xmlns:a16="http://schemas.microsoft.com/office/drawing/2014/main" id="{B10F0998-593C-1229-EF85-BF74A39DAEDB}"/>
+              </a:ext>
+            </a:extLst>
+          </p:cNvPr>
+          <p:cNvGrpSpPr/>
+          <p:nvPr/>
+        </p:nvGrpSpPr>
+        <p:grpSpPr>
+          <a:xfrm>
+            <a:off x="9577302" y="215877"/>
+            <a:ext cx="1695878" cy="706616"/>
+            <a:chOff x="9577302" y="1165376"/>
+            <a:chExt cx="1695878" cy="706616"/>
+          </a:xfrm>
+        </p:grpSpPr>
+        <p:sp>
+          <p:nvSpPr>
+            <p:cNvPr id="5" name="矩形 4">
+              <a:extLst>
+                <a:ext uri="{FF2B5EF4-FFF2-40B4-BE49-F238E27FC236}">
+                  <a16:creationId xmlns:a16="http://schemas.microsoft.com/office/drawing/2014/main" id="{1A9FBEB9-AEF8-632C-6BBF-CBEFF3CB7282}"/>
+                </a:ext>
+              </a:extLst>
+            </p:cNvPr>
+            <p:cNvSpPr/>
+            <p:nvPr/>
+          </p:nvSpPr>
+          <p:spPr>
+            <a:xfrm>
+              <a:off x="9721312" y="1295952"/>
+              <a:ext cx="1440100" cy="432030"/>
+            </a:xfrm>
+            <a:prstGeom prst="rect">
+              <a:avLst/>
+            </a:prstGeom>
+            <a:noFill/>
+            <a:ln>
+              <a:noFill/>
+            </a:ln>
+          </p:spPr>
+          <p:style>
+            <a:lnRef idx="2">
+              <a:schemeClr val="accent1">
+                <a:shade val="15000"/>
+              </a:schemeClr>
+            </a:lnRef>
+            <a:fillRef idx="1">
+              <a:schemeClr val="accent1"/>
+            </a:fillRef>
+            <a:effectRef idx="0">
+              <a:schemeClr val="accent1"/>
+            </a:effectRef>
+            <a:fontRef idx="minor">
+              <a:schemeClr val="lt1"/>
+            </a:fontRef>
+          </p:style>
+          <p:txBody>
+            <a:bodyPr rtlCol="0" anchor="ctr"/>
+            <a:lstStyle/>
+            <a:p>
+              <a:pPr algn="ctr"/>
+              <a:endParaRPr lang="zh-CN" altLang="en-US"/>
+            </a:p>
+          </p:txBody>
+        </p:sp>
+        <p:pic>
+          <p:nvPicPr>
+            <p:cNvPr id="6" name="图片 5">
+              <a:extLst>
+                <a:ext uri="{FF2B5EF4-FFF2-40B4-BE49-F238E27FC236}">
+                  <a16:creationId xmlns:a16="http://schemas.microsoft.com/office/drawing/2014/main" id="{BCC37DA1-4229-BBB2-ABC5-E7838760362B}"/>
+                </a:ext>
+              </a:extLst>
+            </p:cNvPr>
+            <p:cNvPicPr>
+              <a:picLocks noChangeAspect="1"/>
+            </p:cNvPicPr>
+            <p:nvPr/>
+          </p:nvPicPr>
+          <p:blipFill>
+            <a:blip r:embed="rId3">
+              <a:extLst>
+                <a:ext uri="{28A0092B-C50C-407E-A947-70E740481C1C}">
+                  <a14:useLocalDpi xmlns:a14="http://schemas.microsoft.com/office/drawing/2010/main" val="0"/>
+                </a:ext>
+              </a:extLst>
+            </a:blip>
+            <a:stretch>
+              <a:fillRect/>
+            </a:stretch>
+          </p:blipFill>
+          <p:spPr>
+            <a:xfrm>
+              <a:off x="9577302" y="1165376"/>
+              <a:ext cx="1695878" cy="706616"/>
+            </a:xfrm>
+            <a:prstGeom prst="rect">
+              <a:avLst/>
+            </a:prstGeom>
+          </p:spPr>
+        </p:pic>
+      </p:grpSp>
+    </p:spTree>
+    <p:extLst>
+      <p:ext uri="{BB962C8B-B14F-4D97-AF65-F5344CB8AC3E}">
+        <p14:creationId xmlns:p14="http://schemas.microsoft.com/office/powerpoint/2010/main" val="794731086"/>
       </p:ext>
     </p:extLst>
   </p:cSld>
